--- a/public/fun/pack/pptx/birthday/돌잔치_46_성장기록중심_새벽시장.pptx
+++ b/public/fun/pack/pptx/birthday/돌잔치_46_성장기록중심_새벽시장.pptx
@@ -3286,6 +3286,14 @@
 <file path=ppt/slides/slide1.xml><?xml version="1.0" encoding="utf-8"?>
 <p:sld xmlns:a="http://schemas.openxmlformats.org/drawingml/2006/main" xmlns:p="http://schemas.openxmlformats.org/presentationml/2006/main" xmlns:r="http://schemas.openxmlformats.org/officeDocument/2006/relationships">
   <p:cSld>
+    <p:bg>
+      <p:bgPr>
+        <a:solidFill>
+          <a:srgbClr val="D5EEF6"/>
+        </a:solidFill>
+        <a:effectLst/>
+      </p:bgPr>
+    </p:bg>
     <p:spTree>
       <p:nvGrpSpPr>
         <p:cNvPr id="1" name=""/>
@@ -3293,30 +3301,120 @@
         <p:nvPr/>
       </p:nvGrpSpPr>
       <p:grpSpPr/>
-      <p:pic>
-        <p:nvPicPr>
-          <p:cNvPr id="3" name="표지 그림" descr="birthday-46.jpg"/>
-          <p:cNvPicPr>
-            <a:picLocks noChangeAspect="1"/>
-          </p:cNvPicPr>
+      <p:sp>
+        <p:nvSpPr>
+          <p:cNvPr id="3" name="사진 자리"/>
+          <p:cNvSpPr/>
           <p:nvPr/>
-        </p:nvPicPr>
-        <p:blipFill>
-          <a:blip r:embed="rId2"/>
-          <a:stretch>
-            <a:fillRect/>
-          </a:stretch>
-        </p:blipFill>
-        <p:spPr>
-          <a:xfrm>
-            <a:off x="0" y="0"/>
-            <a:ext cx="12191695" cy="6858000"/>
+        </p:nvSpPr>
+        <p:spPr>
+          <a:xfrm>
+            <a:off x="7071183" y="960120"/>
+            <a:ext cx="3657508" cy="4526280"/>
+          </a:xfrm>
+          <a:prstGeom prst="roundRect">
+            <a:avLst>
+              <a:gd name="adj" fmla="val 4000"/>
+            </a:avLst>
+          </a:prstGeom>
+          <a:solidFill>
+            <a:srgbClr val="ADDBEB"/>
+          </a:solidFill>
+          <a:ln>
+            <a:noFill/>
+          </a:ln>
+        </p:spPr>
+        <p:txBody>
+          <a:bodyPr rtlCol="0" anchor="ctr" wrap="square" lIns="54864" rIns="54864" tIns="27432" bIns="27432">
+            <a:noAutofit/>
+          </a:bodyPr>
+          <a:lstStyle/>
+          <a:p>
+            <a:pPr algn="ctr">
+              <a:lnSpc>
+                <a:spcPct val="100000"/>
+              </a:lnSpc>
+            </a:pPr>
+            <a:r>
+              <a:rPr sz="1400" b="0" i="0">
+                <a:solidFill>
+                  <a:srgbClr val="274149"/>
+                </a:solidFill>
+              </a:rPr>
+              <a:t>사진을 넣어 주세요</a:t>
+            </a:r>
+          </a:p>
+        </p:txBody>
+      </p:sp>
+      <p:sp>
+        <p:nvSpPr>
+          <p:cNvPr id="4" name="장식"/>
+          <p:cNvSpPr/>
+          <p:nvPr/>
+        </p:nvSpPr>
+        <p:spPr>
+          <a:xfrm>
+            <a:off x="7558851" y="1234439"/>
+            <a:ext cx="3657508" cy="4526280"/>
+          </a:xfrm>
+          <a:prstGeom prst="roundRect">
+            <a:avLst>
+              <a:gd name="adj" fmla="val 4000"/>
+            </a:avLst>
+          </a:prstGeom>
+          <a:noFill/>
+          <a:ln w="9525">
+            <a:solidFill>
+              <a:srgbClr val="26231F"/>
+            </a:solidFill>
+          </a:ln>
+        </p:spPr>
+        <p:txBody>
+          <a:bodyPr rtlCol="0" anchor="ctr"/>
+          <a:lstStyle/>
+          <a:p>
+            <a:pPr algn="ctr"/>
+          </a:p>
+        </p:txBody>
+      </p:sp>
+      <p:sp>
+        <p:nvSpPr>
+          <p:cNvPr id="5" name="라벨"/>
+          <p:cNvSpPr txBox="1"/>
+          <p:nvPr/>
+        </p:nvSpPr>
+        <p:spPr>
+          <a:xfrm>
+            <a:off x="822960" y="2148840"/>
+            <a:ext cx="5608179" cy="274320"/>
           </a:xfrm>
           <a:prstGeom prst="rect">
             <a:avLst/>
           </a:prstGeom>
-        </p:spPr>
-      </p:pic>
+          <a:noFill/>
+        </p:spPr>
+        <p:txBody>
+          <a:bodyPr wrap="square" lIns="54864" rIns="54864" tIns="27432" bIns="27432" anchor="t">
+            <a:noAutofit/>
+          </a:bodyPr>
+          <a:lstStyle/>
+          <a:p>
+            <a:pPr algn="l">
+              <a:lnSpc>
+                <a:spcPct val="115000"/>
+              </a:lnSpc>
+            </a:pPr>
+            <a:r>
+              <a:rPr sz="1000" b="1" i="0" spc="250">
+                <a:solidFill>
+                  <a:srgbClr val="26231F"/>
+                </a:solidFill>
+              </a:rPr>
+              <a:t>FIRST BIRTHDAY</a:t>
+            </a:r>
+          </a:p>
+        </p:txBody>
+      </p:sp>
       <p:sp>
         <p:nvSpPr>
           <p:cNvPr id="2" name="Title 1"/>
@@ -3329,8 +3427,8 @@
         </p:nvSpPr>
         <p:spPr>
           <a:xfrm>
-            <a:off x="853418" y="2057400"/>
-            <a:ext cx="6095847" cy="1554480"/>
+            <a:off x="822960" y="2606040"/>
+            <a:ext cx="5608179" cy="1188720"/>
           </a:xfrm>
         </p:spPr>
         <p:txBody>
@@ -3347,7 +3445,7 @@
             <a:r>
               <a:rPr sz="4000" b="1" i="0">
                 <a:solidFill>
-                  <a:srgbClr val="253A41"/>
+                  <a:srgbClr val="26231F"/>
                 </a:solidFill>
               </a:rPr>
               <a:t>첫 번째 생일</a:t>
@@ -3357,14 +3455,14 @@
       </p:sp>
       <p:sp>
         <p:nvSpPr>
-          <p:cNvPr id="4" name="한 줄 문구"/>
+          <p:cNvPr id="6" name="한 줄 문구"/>
           <p:cNvSpPr txBox="1"/>
           <p:nvPr/>
         </p:nvSpPr>
         <p:spPr>
           <a:xfrm>
-            <a:off x="853418" y="3749039"/>
-            <a:ext cx="6095847" cy="822960"/>
+            <a:off x="822960" y="3886200"/>
+            <a:ext cx="5608179" cy="822960"/>
           </a:xfrm>
           <a:prstGeom prst="rect">
             <a:avLst/>
@@ -3383,26 +3481,26 @@
               </a:lnSpc>
             </a:pPr>
             <a:r>
-              <a:rPr sz="1700" b="0" i="1">
+              <a:rPr sz="1700" b="0" i="0">
                 <a:solidFill>
-                  <a:srgbClr val="253A41"/>
+                  <a:srgbClr val="26231F"/>
                 </a:solidFill>
               </a:rPr>
-              <a:t>열두 달, 잘 자라 주었습니다</a:t>
-            </a:r>
-          </a:p>
-        </p:txBody>
-      </p:sp>
-      <p:sp>
-        <p:nvSpPr>
-          <p:cNvPr id="5" name="안내 문구"/>
+              <a:t>그동안 잘 자라 주었습니다</a:t>
+            </a:r>
+          </a:p>
+        </p:txBody>
+      </p:sp>
+      <p:sp>
+        <p:nvSpPr>
+          <p:cNvPr id="7" name="안내 문구"/>
           <p:cNvSpPr txBox="1"/>
           <p:nvPr/>
         </p:nvSpPr>
         <p:spPr>
           <a:xfrm>
-            <a:off x="853418" y="4617720"/>
-            <a:ext cx="6095847" cy="914400"/>
+            <a:off x="822960" y="4754880"/>
+            <a:ext cx="5608179" cy="914400"/>
           </a:xfrm>
           <a:prstGeom prst="rect">
             <a:avLst/>
@@ -3423,10 +3521,10 @@
             <a:r>
               <a:rPr sz="1400" b="0" i="0">
                 <a:solidFill>
-                  <a:srgbClr val="666666"/>
+                  <a:srgbClr val="26231F"/>
                 </a:solidFill>
               </a:rPr>
-              <a:t>아기 이름 · 2027. 00. 00</a:t>
+              <a:t>아기 이름 · 날짜 입력</a:t>
             </a:r>
           </a:p>
           <a:p>
@@ -3438,7 +3536,7 @@
             <a:r>
               <a:rPr sz="1400" b="0" i="0">
                 <a:solidFill>
-                  <a:srgbClr val="666666"/>
+                  <a:srgbClr val="26231F"/>
                 </a:solidFill>
               </a:rPr>
               <a:t>장소를 입력하세요</a:t>
@@ -3480,14 +3578,110 @@
         </p:nvSpPr>
         <p:spPr>
           <a:xfrm>
-            <a:off x="0" y="384048"/>
-            <a:ext cx="9509522" cy="896112"/>
-          </a:xfrm>
-          <a:prstGeom prst="homePlate">
+            <a:off x="0" y="6565392"/>
+            <a:ext cx="12191695" cy="292608"/>
+          </a:xfrm>
+          <a:prstGeom prst="rect">
             <a:avLst/>
           </a:prstGeom>
           <a:solidFill>
-            <a:srgbClr val="497483"/>
+            <a:srgbClr val="ADDBEB"/>
+          </a:solidFill>
+          <a:ln>
+            <a:noFill/>
+          </a:ln>
+        </p:spPr>
+        <p:txBody>
+          <a:bodyPr rtlCol="0" anchor="ctr"/>
+          <a:lstStyle/>
+          <a:p>
+            <a:pPr algn="ctr"/>
+          </a:p>
+        </p:txBody>
+      </p:sp>
+      <p:sp>
+        <p:nvSpPr>
+          <p:cNvPr id="4" name="장식"/>
+          <p:cNvSpPr/>
+          <p:nvPr/>
+        </p:nvSpPr>
+        <p:spPr>
+          <a:xfrm>
+            <a:off x="640080" y="566928"/>
+            <a:ext cx="10911535" cy="10972"/>
+          </a:xfrm>
+          <a:prstGeom prst="rect">
+            <a:avLst/>
+          </a:prstGeom>
+          <a:solidFill>
+            <a:srgbClr val="26231F"/>
+          </a:solidFill>
+          <a:ln>
+            <a:noFill/>
+          </a:ln>
+        </p:spPr>
+        <p:txBody>
+          <a:bodyPr rtlCol="0" anchor="ctr"/>
+          <a:lstStyle/>
+          <a:p>
+            <a:pPr algn="ctr"/>
+          </a:p>
+        </p:txBody>
+      </p:sp>
+      <p:sp>
+        <p:nvSpPr>
+          <p:cNvPr id="5" name="상단 라벨"/>
+          <p:cNvSpPr txBox="1"/>
+          <p:nvPr/>
+        </p:nvSpPr>
+        <p:spPr>
+          <a:xfrm>
+            <a:off x="640080" y="237744"/>
+            <a:ext cx="5486400" cy="274320"/>
+          </a:xfrm>
+          <a:prstGeom prst="rect">
+            <a:avLst/>
+          </a:prstGeom>
+          <a:noFill/>
+        </p:spPr>
+        <p:txBody>
+          <a:bodyPr wrap="square" lIns="54864" rIns="54864" tIns="27432" bIns="27432" anchor="ctr">
+            <a:noAutofit/>
+          </a:bodyPr>
+          <a:lstStyle/>
+          <a:p>
+            <a:pPr algn="l">
+              <a:lnSpc>
+                <a:spcPct val="115000"/>
+              </a:lnSpc>
+            </a:pPr>
+            <a:r>
+              <a:rPr sz="900" b="1" i="0" spc="250">
+                <a:solidFill>
+                  <a:srgbClr val="26231F"/>
+                </a:solidFill>
+              </a:rPr>
+              <a:t>FIRST BIRTHDAY</a:t>
+            </a:r>
+          </a:p>
+        </p:txBody>
+      </p:sp>
+      <p:sp>
+        <p:nvSpPr>
+          <p:cNvPr id="6" name="포인트"/>
+          <p:cNvSpPr/>
+          <p:nvPr/>
+        </p:nvSpPr>
+        <p:spPr>
+          <a:xfrm>
+            <a:off x="11204143" y="246888"/>
+            <a:ext cx="237744" cy="237744"/>
+          </a:xfrm>
+          <a:prstGeom prst="moon">
+            <a:avLst/>
+          </a:prstGeom>
+          <a:solidFill>
+            <a:srgbClr val="98CFE1"/>
           </a:solidFill>
           <a:ln>
             <a:noFill/>
@@ -3513,8 +3707,8 @@
         </p:nvSpPr>
         <p:spPr>
           <a:xfrm>
-            <a:off x="640080" y="411480"/>
-            <a:ext cx="8412242" cy="822960"/>
+            <a:off x="640080" y="731520"/>
+            <a:ext cx="10911535" cy="822960"/>
           </a:xfrm>
         </p:spPr>
         <p:txBody>
@@ -3531,7 +3725,7 @@
             <a:r>
               <a:rPr sz="3000" b="1" i="0">
                 <a:solidFill>
-                  <a:srgbClr val="FFFFFF"/>
+                  <a:srgbClr val="26231F"/>
                 </a:solidFill>
               </a:rPr>
               <a:t>우리 아기를 소개합니다</a:t>
@@ -3541,14 +3735,14 @@
       </p:sp>
       <p:sp>
         <p:nvSpPr>
-          <p:cNvPr id="4" name="사진 자리"/>
+          <p:cNvPr id="7" name="사진 자리"/>
           <p:cNvSpPr/>
           <p:nvPr/>
         </p:nvSpPr>
         <p:spPr>
           <a:xfrm>
-            <a:off x="640080" y="1645920"/>
-            <a:ext cx="3840480" cy="4572000"/>
+            <a:off x="640080" y="1783080"/>
+            <a:ext cx="3840480" cy="4206240"/>
           </a:xfrm>
           <a:prstGeom prst="roundRect">
             <a:avLst>
@@ -3556,12 +3750,10 @@
             </a:avLst>
           </a:prstGeom>
           <a:solidFill>
-            <a:srgbClr val="D6E5EA"/>
+            <a:srgbClr val="D5EEF6"/>
           </a:solidFill>
           <a:ln w="19050">
-            <a:solidFill>
-              <a:srgbClr val="497483"/>
-            </a:solidFill>
+            <a:noFill/>
             <a:prstDash val="dash"/>
           </a:ln>
         </p:spPr>
@@ -3579,7 +3771,7 @@
             <a:r>
               <a:rPr sz="1400" b="0" i="0">
                 <a:solidFill>
-                  <a:srgbClr val="253A41"/>
+                  <a:srgbClr val="8E8780"/>
                 </a:solidFill>
               </a:rPr>
               <a:t>아기 사진을 넣어 주세요</a:t>
@@ -3589,14 +3781,14 @@
       </p:sp>
       <p:graphicFrame>
         <p:nvGraphicFramePr>
-          <p:cNvPr id="5" name="표"/>
+          <p:cNvPr id="8" name="표"/>
           <p:cNvGraphicFramePr>
             <a:graphicFrameLocks noGrp="1"/>
           </p:cNvGraphicFramePr>
           <p:nvPr/>
         </p:nvGraphicFramePr>
         <p:xfrm>
-          <a:off x="4846320" y="1645920"/>
+          <a:off x="4846320" y="1783080"/>
           <a:ext cx="6705295" cy="3950208"/>
         </p:xfrm>
         <a:graphic>
@@ -3619,7 +3811,7 @@
                       <a:r>
                         <a:rPr sz="1500" b="1">
                           <a:solidFill>
-                            <a:srgbClr val="253A41"/>
+                            <a:srgbClr val="274149"/>
                           </a:solidFill>
                         </a:rPr>
                         <a:t>이름</a:t>
@@ -3629,30 +3821,30 @@
                   <a:tcPr anchor="ctr" marL="73152" marR="73152">
                     <a:lnL w="9525" cap="flat" cmpd="sng" algn="ctr">
                       <a:solidFill>
-                        <a:srgbClr val="D6E5EA"/>
+                        <a:srgbClr val="D5EEF6"/>
                       </a:solidFill>
                       <a:prstDash val="solid"/>
                     </a:lnL>
                     <a:lnR w="9525" cap="flat" cmpd="sng" algn="ctr">
                       <a:solidFill>
-                        <a:srgbClr val="D6E5EA"/>
+                        <a:srgbClr val="D5EEF6"/>
                       </a:solidFill>
                       <a:prstDash val="solid"/>
                     </a:lnR>
                     <a:lnT w="9525" cap="flat" cmpd="sng" algn="ctr">
                       <a:solidFill>
-                        <a:srgbClr val="D6E5EA"/>
+                        <a:srgbClr val="D5EEF6"/>
                       </a:solidFill>
                       <a:prstDash val="solid"/>
                     </a:lnT>
                     <a:lnB w="9525" cap="flat" cmpd="sng" algn="ctr">
                       <a:solidFill>
-                        <a:srgbClr val="D6E5EA"/>
+                        <a:srgbClr val="D5EEF6"/>
                       </a:solidFill>
                       <a:prstDash val="solid"/>
                     </a:lnB>
                     <a:solidFill>
-                      <a:srgbClr val="D6E5EA"/>
+                      <a:srgbClr val="D5EEF6"/>
                     </a:solidFill>
                   </a:tcPr>
                 </a:tc>
@@ -3665,7 +3857,7 @@
                       <a:r>
                         <a:rPr sz="1500" b="0">
                           <a:solidFill>
-                            <a:srgbClr val="2B2B2B"/>
+                            <a:srgbClr val="26231F"/>
                           </a:solidFill>
                         </a:rPr>
                         <a:t>입력하세요</a:t>
@@ -3675,30 +3867,30 @@
                   <a:tcPr anchor="ctr" marL="73152" marR="73152">
                     <a:lnL w="9525" cap="flat" cmpd="sng" algn="ctr">
                       <a:solidFill>
-                        <a:srgbClr val="D6E5EA"/>
+                        <a:srgbClr val="D5EEF6"/>
                       </a:solidFill>
                       <a:prstDash val="solid"/>
                     </a:lnL>
                     <a:lnR w="9525" cap="flat" cmpd="sng" algn="ctr">
                       <a:solidFill>
-                        <a:srgbClr val="D6E5EA"/>
+                        <a:srgbClr val="D5EEF6"/>
                       </a:solidFill>
                       <a:prstDash val="solid"/>
                     </a:lnR>
                     <a:lnT w="9525" cap="flat" cmpd="sng" algn="ctr">
                       <a:solidFill>
-                        <a:srgbClr val="D6E5EA"/>
+                        <a:srgbClr val="D5EEF6"/>
                       </a:solidFill>
                       <a:prstDash val="solid"/>
                     </a:lnT>
                     <a:lnB w="9525" cap="flat" cmpd="sng" algn="ctr">
                       <a:solidFill>
-                        <a:srgbClr val="D6E5EA"/>
+                        <a:srgbClr val="D5EEF6"/>
                       </a:solidFill>
                       <a:prstDash val="solid"/>
                     </a:lnB>
                     <a:solidFill>
-                      <a:srgbClr val="F2F6F8"/>
+                      <a:srgbClr val="ECF7FB"/>
                     </a:solidFill>
                   </a:tcPr>
                 </a:tc>
@@ -3713,7 +3905,7 @@
                       <a:r>
                         <a:rPr sz="1500" b="1">
                           <a:solidFill>
-                            <a:srgbClr val="253A41"/>
+                            <a:srgbClr val="274149"/>
                           </a:solidFill>
                         </a:rPr>
                         <a:t>생일</a:t>
@@ -3723,30 +3915,30 @@
                   <a:tcPr anchor="ctr" marL="73152" marR="73152">
                     <a:lnL w="9525" cap="flat" cmpd="sng" algn="ctr">
                       <a:solidFill>
-                        <a:srgbClr val="D6E5EA"/>
+                        <a:srgbClr val="D5EEF6"/>
                       </a:solidFill>
                       <a:prstDash val="solid"/>
                     </a:lnL>
                     <a:lnR w="9525" cap="flat" cmpd="sng" algn="ctr">
                       <a:solidFill>
-                        <a:srgbClr val="D6E5EA"/>
+                        <a:srgbClr val="D5EEF6"/>
                       </a:solidFill>
                       <a:prstDash val="solid"/>
                     </a:lnR>
                     <a:lnT w="9525" cap="flat" cmpd="sng" algn="ctr">
                       <a:solidFill>
-                        <a:srgbClr val="D6E5EA"/>
+                        <a:srgbClr val="D5EEF6"/>
                       </a:solidFill>
                       <a:prstDash val="solid"/>
                     </a:lnT>
                     <a:lnB w="9525" cap="flat" cmpd="sng" algn="ctr">
                       <a:solidFill>
-                        <a:srgbClr val="D6E5EA"/>
+                        <a:srgbClr val="D5EEF6"/>
                       </a:solidFill>
                       <a:prstDash val="solid"/>
                     </a:lnB>
                     <a:solidFill>
-                      <a:srgbClr val="D6E5EA"/>
+                      <a:srgbClr val="D5EEF6"/>
                     </a:solidFill>
                   </a:tcPr>
                 </a:tc>
@@ -3759,7 +3951,7 @@
                       <a:r>
                         <a:rPr sz="1500" b="0">
                           <a:solidFill>
-                            <a:srgbClr val="2B2B2B"/>
+                            <a:srgbClr val="26231F"/>
                           </a:solidFill>
                         </a:rPr>
                         <a:t>입력하세요</a:t>
@@ -3769,25 +3961,25 @@
                   <a:tcPr anchor="ctr" marL="73152" marR="73152">
                     <a:lnL w="9525" cap="flat" cmpd="sng" algn="ctr">
                       <a:solidFill>
-                        <a:srgbClr val="D6E5EA"/>
+                        <a:srgbClr val="D5EEF6"/>
                       </a:solidFill>
                       <a:prstDash val="solid"/>
                     </a:lnL>
                     <a:lnR w="9525" cap="flat" cmpd="sng" algn="ctr">
                       <a:solidFill>
-                        <a:srgbClr val="D6E5EA"/>
+                        <a:srgbClr val="D5EEF6"/>
                       </a:solidFill>
                       <a:prstDash val="solid"/>
                     </a:lnR>
                     <a:lnT w="9525" cap="flat" cmpd="sng" algn="ctr">
                       <a:solidFill>
-                        <a:srgbClr val="D6E5EA"/>
+                        <a:srgbClr val="D5EEF6"/>
                       </a:solidFill>
                       <a:prstDash val="solid"/>
                     </a:lnT>
                     <a:lnB w="9525" cap="flat" cmpd="sng" algn="ctr">
                       <a:solidFill>
-                        <a:srgbClr val="D6E5EA"/>
+                        <a:srgbClr val="D5EEF6"/>
                       </a:solidFill>
                       <a:prstDash val="solid"/>
                     </a:lnB>
@@ -3807,7 +3999,7 @@
                       <a:r>
                         <a:rPr sz="1500" b="1">
                           <a:solidFill>
-                            <a:srgbClr val="253A41"/>
+                            <a:srgbClr val="274149"/>
                           </a:solidFill>
                         </a:rPr>
                         <a:t>키 · 몸무게</a:t>
@@ -3817,30 +4009,30 @@
                   <a:tcPr anchor="ctr" marL="73152" marR="73152">
                     <a:lnL w="9525" cap="flat" cmpd="sng" algn="ctr">
                       <a:solidFill>
-                        <a:srgbClr val="D6E5EA"/>
+                        <a:srgbClr val="D5EEF6"/>
                       </a:solidFill>
                       <a:prstDash val="solid"/>
                     </a:lnL>
                     <a:lnR w="9525" cap="flat" cmpd="sng" algn="ctr">
                       <a:solidFill>
-                        <a:srgbClr val="D6E5EA"/>
+                        <a:srgbClr val="D5EEF6"/>
                       </a:solidFill>
                       <a:prstDash val="solid"/>
                     </a:lnR>
                     <a:lnT w="9525" cap="flat" cmpd="sng" algn="ctr">
                       <a:solidFill>
-                        <a:srgbClr val="D6E5EA"/>
+                        <a:srgbClr val="D5EEF6"/>
                       </a:solidFill>
                       <a:prstDash val="solid"/>
                     </a:lnT>
                     <a:lnB w="9525" cap="flat" cmpd="sng" algn="ctr">
                       <a:solidFill>
-                        <a:srgbClr val="D6E5EA"/>
+                        <a:srgbClr val="D5EEF6"/>
                       </a:solidFill>
                       <a:prstDash val="solid"/>
                     </a:lnB>
                     <a:solidFill>
-                      <a:srgbClr val="D6E5EA"/>
+                      <a:srgbClr val="D5EEF6"/>
                     </a:solidFill>
                   </a:tcPr>
                 </a:tc>
@@ -3853,7 +4045,7 @@
                       <a:r>
                         <a:rPr sz="1500" b="0">
                           <a:solidFill>
-                            <a:srgbClr val="2B2B2B"/>
+                            <a:srgbClr val="26231F"/>
                           </a:solidFill>
                         </a:rPr>
                         <a:t>입력하세요</a:t>
@@ -3863,30 +4055,30 @@
                   <a:tcPr anchor="ctr" marL="73152" marR="73152">
                     <a:lnL w="9525" cap="flat" cmpd="sng" algn="ctr">
                       <a:solidFill>
-                        <a:srgbClr val="D6E5EA"/>
+                        <a:srgbClr val="D5EEF6"/>
                       </a:solidFill>
                       <a:prstDash val="solid"/>
                     </a:lnL>
                     <a:lnR w="9525" cap="flat" cmpd="sng" algn="ctr">
                       <a:solidFill>
-                        <a:srgbClr val="D6E5EA"/>
+                        <a:srgbClr val="D5EEF6"/>
                       </a:solidFill>
                       <a:prstDash val="solid"/>
                     </a:lnR>
                     <a:lnT w="9525" cap="flat" cmpd="sng" algn="ctr">
                       <a:solidFill>
-                        <a:srgbClr val="D6E5EA"/>
+                        <a:srgbClr val="D5EEF6"/>
                       </a:solidFill>
                       <a:prstDash val="solid"/>
                     </a:lnT>
                     <a:lnB w="9525" cap="flat" cmpd="sng" algn="ctr">
                       <a:solidFill>
-                        <a:srgbClr val="D6E5EA"/>
+                        <a:srgbClr val="D5EEF6"/>
                       </a:solidFill>
                       <a:prstDash val="solid"/>
                     </a:lnB>
                     <a:solidFill>
-                      <a:srgbClr val="F2F6F8"/>
+                      <a:srgbClr val="ECF7FB"/>
                     </a:solidFill>
                   </a:tcPr>
                 </a:tc>
@@ -3901,7 +4093,7 @@
                       <a:r>
                         <a:rPr sz="1500" b="1">
                           <a:solidFill>
-                            <a:srgbClr val="253A41"/>
+                            <a:srgbClr val="274149"/>
                           </a:solidFill>
                         </a:rPr>
                         <a:t>좋아하는 것</a:t>
@@ -3911,30 +4103,30 @@
                   <a:tcPr anchor="ctr" marL="73152" marR="73152">
                     <a:lnL w="9525" cap="flat" cmpd="sng" algn="ctr">
                       <a:solidFill>
-                        <a:srgbClr val="D6E5EA"/>
+                        <a:srgbClr val="D5EEF6"/>
                       </a:solidFill>
                       <a:prstDash val="solid"/>
                     </a:lnL>
                     <a:lnR w="9525" cap="flat" cmpd="sng" algn="ctr">
                       <a:solidFill>
-                        <a:srgbClr val="D6E5EA"/>
+                        <a:srgbClr val="D5EEF6"/>
                       </a:solidFill>
                       <a:prstDash val="solid"/>
                     </a:lnR>
                     <a:lnT w="9525" cap="flat" cmpd="sng" algn="ctr">
                       <a:solidFill>
-                        <a:srgbClr val="D6E5EA"/>
+                        <a:srgbClr val="D5EEF6"/>
                       </a:solidFill>
                       <a:prstDash val="solid"/>
                     </a:lnT>
                     <a:lnB w="9525" cap="flat" cmpd="sng" algn="ctr">
                       <a:solidFill>
-                        <a:srgbClr val="D6E5EA"/>
+                        <a:srgbClr val="D5EEF6"/>
                       </a:solidFill>
                       <a:prstDash val="solid"/>
                     </a:lnB>
                     <a:solidFill>
-                      <a:srgbClr val="D6E5EA"/>
+                      <a:srgbClr val="D5EEF6"/>
                     </a:solidFill>
                   </a:tcPr>
                 </a:tc>
@@ -3947,7 +4139,7 @@
                       <a:r>
                         <a:rPr sz="1500" b="0">
                           <a:solidFill>
-                            <a:srgbClr val="2B2B2B"/>
+                            <a:srgbClr val="26231F"/>
                           </a:solidFill>
                         </a:rPr>
                         <a:t>입력하세요</a:t>
@@ -3957,25 +4149,25 @@
                   <a:tcPr anchor="ctr" marL="73152" marR="73152">
                     <a:lnL w="9525" cap="flat" cmpd="sng" algn="ctr">
                       <a:solidFill>
-                        <a:srgbClr val="D6E5EA"/>
+                        <a:srgbClr val="D5EEF6"/>
                       </a:solidFill>
                       <a:prstDash val="solid"/>
                     </a:lnL>
                     <a:lnR w="9525" cap="flat" cmpd="sng" algn="ctr">
                       <a:solidFill>
-                        <a:srgbClr val="D6E5EA"/>
+                        <a:srgbClr val="D5EEF6"/>
                       </a:solidFill>
                       <a:prstDash val="solid"/>
                     </a:lnR>
                     <a:lnT w="9525" cap="flat" cmpd="sng" algn="ctr">
                       <a:solidFill>
-                        <a:srgbClr val="D6E5EA"/>
+                        <a:srgbClr val="D5EEF6"/>
                       </a:solidFill>
                       <a:prstDash val="solid"/>
                     </a:lnT>
                     <a:lnB w="9525" cap="flat" cmpd="sng" algn="ctr">
                       <a:solidFill>
-                        <a:srgbClr val="D6E5EA"/>
+                        <a:srgbClr val="D5EEF6"/>
                       </a:solidFill>
                       <a:prstDash val="solid"/>
                     </a:lnB>
@@ -3995,7 +4187,7 @@
                       <a:r>
                         <a:rPr sz="1500" b="1">
                           <a:solidFill>
-                            <a:srgbClr val="253A41"/>
+                            <a:srgbClr val="274149"/>
                           </a:solidFill>
                         </a:rPr>
                         <a:t>별명</a:t>
@@ -4005,30 +4197,30 @@
                   <a:tcPr anchor="ctr" marL="73152" marR="73152">
                     <a:lnL w="9525" cap="flat" cmpd="sng" algn="ctr">
                       <a:solidFill>
-                        <a:srgbClr val="D6E5EA"/>
+                        <a:srgbClr val="D5EEF6"/>
                       </a:solidFill>
                       <a:prstDash val="solid"/>
                     </a:lnL>
                     <a:lnR w="9525" cap="flat" cmpd="sng" algn="ctr">
                       <a:solidFill>
-                        <a:srgbClr val="D6E5EA"/>
+                        <a:srgbClr val="D5EEF6"/>
                       </a:solidFill>
                       <a:prstDash val="solid"/>
                     </a:lnR>
                     <a:lnT w="9525" cap="flat" cmpd="sng" algn="ctr">
                       <a:solidFill>
-                        <a:srgbClr val="D6E5EA"/>
+                        <a:srgbClr val="D5EEF6"/>
                       </a:solidFill>
                       <a:prstDash val="solid"/>
                     </a:lnT>
                     <a:lnB w="9525" cap="flat" cmpd="sng" algn="ctr">
                       <a:solidFill>
-                        <a:srgbClr val="D6E5EA"/>
+                        <a:srgbClr val="D5EEF6"/>
                       </a:solidFill>
                       <a:prstDash val="solid"/>
                     </a:lnB>
                     <a:solidFill>
-                      <a:srgbClr val="D6E5EA"/>
+                      <a:srgbClr val="D5EEF6"/>
                     </a:solidFill>
                   </a:tcPr>
                 </a:tc>
@@ -4041,7 +4233,7 @@
                       <a:r>
                         <a:rPr sz="1500" b="0">
                           <a:solidFill>
-                            <a:srgbClr val="2B2B2B"/>
+                            <a:srgbClr val="26231F"/>
                           </a:solidFill>
                         </a:rPr>
                         <a:t>입력하세요</a:t>
@@ -4051,30 +4243,30 @@
                   <a:tcPr anchor="ctr" marL="73152" marR="73152">
                     <a:lnL w="9525" cap="flat" cmpd="sng" algn="ctr">
                       <a:solidFill>
-                        <a:srgbClr val="D6E5EA"/>
+                        <a:srgbClr val="D5EEF6"/>
                       </a:solidFill>
                       <a:prstDash val="solid"/>
                     </a:lnL>
                     <a:lnR w="9525" cap="flat" cmpd="sng" algn="ctr">
                       <a:solidFill>
-                        <a:srgbClr val="D6E5EA"/>
+                        <a:srgbClr val="D5EEF6"/>
                       </a:solidFill>
                       <a:prstDash val="solid"/>
                     </a:lnR>
                     <a:lnT w="9525" cap="flat" cmpd="sng" algn="ctr">
                       <a:solidFill>
-                        <a:srgbClr val="D6E5EA"/>
+                        <a:srgbClr val="D5EEF6"/>
                       </a:solidFill>
                       <a:prstDash val="solid"/>
                     </a:lnT>
                     <a:lnB w="9525" cap="flat" cmpd="sng" algn="ctr">
                       <a:solidFill>
-                        <a:srgbClr val="D6E5EA"/>
+                        <a:srgbClr val="D5EEF6"/>
                       </a:solidFill>
                       <a:prstDash val="solid"/>
                     </a:lnB>
                     <a:solidFill>
-                      <a:srgbClr val="F2F6F8"/>
+                      <a:srgbClr val="ECF7FB"/>
                     </a:solidFill>
                   </a:tcPr>
                 </a:tc>
@@ -4089,7 +4281,7 @@
                       <a:r>
                         <a:rPr sz="1500" b="1">
                           <a:solidFill>
-                            <a:srgbClr val="253A41"/>
+                            <a:srgbClr val="274149"/>
                           </a:solidFill>
                         </a:rPr>
                         <a:t>부모의 마음</a:t>
@@ -4099,30 +4291,30 @@
                   <a:tcPr anchor="ctr" marL="73152" marR="73152">
                     <a:lnL w="9525" cap="flat" cmpd="sng" algn="ctr">
                       <a:solidFill>
-                        <a:srgbClr val="D6E5EA"/>
+                        <a:srgbClr val="D5EEF6"/>
                       </a:solidFill>
                       <a:prstDash val="solid"/>
                     </a:lnL>
                     <a:lnR w="9525" cap="flat" cmpd="sng" algn="ctr">
                       <a:solidFill>
-                        <a:srgbClr val="D6E5EA"/>
+                        <a:srgbClr val="D5EEF6"/>
                       </a:solidFill>
                       <a:prstDash val="solid"/>
                     </a:lnR>
                     <a:lnT w="9525" cap="flat" cmpd="sng" algn="ctr">
                       <a:solidFill>
-                        <a:srgbClr val="D6E5EA"/>
+                        <a:srgbClr val="D5EEF6"/>
                       </a:solidFill>
                       <a:prstDash val="solid"/>
                     </a:lnT>
                     <a:lnB w="9525" cap="flat" cmpd="sng" algn="ctr">
                       <a:solidFill>
-                        <a:srgbClr val="D6E5EA"/>
+                        <a:srgbClr val="D5EEF6"/>
                       </a:solidFill>
                       <a:prstDash val="solid"/>
                     </a:lnB>
                     <a:solidFill>
-                      <a:srgbClr val="D6E5EA"/>
+                      <a:srgbClr val="D5EEF6"/>
                     </a:solidFill>
                   </a:tcPr>
                 </a:tc>
@@ -4135,7 +4327,7 @@
                       <a:r>
                         <a:rPr sz="1500" b="0">
                           <a:solidFill>
-                            <a:srgbClr val="2B2B2B"/>
+                            <a:srgbClr val="26231F"/>
                           </a:solidFill>
                         </a:rPr>
                         <a:t>입력하세요</a:t>
@@ -4145,25 +4337,25 @@
                   <a:tcPr anchor="ctr" marL="73152" marR="73152">
                     <a:lnL w="9525" cap="flat" cmpd="sng" algn="ctr">
                       <a:solidFill>
-                        <a:srgbClr val="D6E5EA"/>
+                        <a:srgbClr val="D5EEF6"/>
                       </a:solidFill>
                       <a:prstDash val="solid"/>
                     </a:lnL>
                     <a:lnR w="9525" cap="flat" cmpd="sng" algn="ctr">
                       <a:solidFill>
-                        <a:srgbClr val="D6E5EA"/>
+                        <a:srgbClr val="D5EEF6"/>
                       </a:solidFill>
                       <a:prstDash val="solid"/>
                     </a:lnR>
                     <a:lnT w="9525" cap="flat" cmpd="sng" algn="ctr">
                       <a:solidFill>
-                        <a:srgbClr val="D6E5EA"/>
+                        <a:srgbClr val="D5EEF6"/>
                       </a:solidFill>
                       <a:prstDash val="solid"/>
                     </a:lnT>
                     <a:lnB w="9525" cap="flat" cmpd="sng" algn="ctr">
                       <a:solidFill>
-                        <a:srgbClr val="D6E5EA"/>
+                        <a:srgbClr val="D5EEF6"/>
                       </a:solidFill>
                       <a:prstDash val="solid"/>
                     </a:lnB>
@@ -4211,14 +4403,110 @@
         </p:nvSpPr>
         <p:spPr>
           <a:xfrm>
-            <a:off x="0" y="384048"/>
-            <a:ext cx="9509522" cy="896112"/>
-          </a:xfrm>
-          <a:prstGeom prst="homePlate">
+            <a:off x="0" y="6565392"/>
+            <a:ext cx="12191695" cy="292608"/>
+          </a:xfrm>
+          <a:prstGeom prst="rect">
             <a:avLst/>
           </a:prstGeom>
           <a:solidFill>
-            <a:srgbClr val="497483"/>
+            <a:srgbClr val="ADDBEB"/>
+          </a:solidFill>
+          <a:ln>
+            <a:noFill/>
+          </a:ln>
+        </p:spPr>
+        <p:txBody>
+          <a:bodyPr rtlCol="0" anchor="ctr"/>
+          <a:lstStyle/>
+          <a:p>
+            <a:pPr algn="ctr"/>
+          </a:p>
+        </p:txBody>
+      </p:sp>
+      <p:sp>
+        <p:nvSpPr>
+          <p:cNvPr id="4" name="장식"/>
+          <p:cNvSpPr/>
+          <p:nvPr/>
+        </p:nvSpPr>
+        <p:spPr>
+          <a:xfrm>
+            <a:off x="640080" y="566928"/>
+            <a:ext cx="10911535" cy="10972"/>
+          </a:xfrm>
+          <a:prstGeom prst="rect">
+            <a:avLst/>
+          </a:prstGeom>
+          <a:solidFill>
+            <a:srgbClr val="26231F"/>
+          </a:solidFill>
+          <a:ln>
+            <a:noFill/>
+          </a:ln>
+        </p:spPr>
+        <p:txBody>
+          <a:bodyPr rtlCol="0" anchor="ctr"/>
+          <a:lstStyle/>
+          <a:p>
+            <a:pPr algn="ctr"/>
+          </a:p>
+        </p:txBody>
+      </p:sp>
+      <p:sp>
+        <p:nvSpPr>
+          <p:cNvPr id="5" name="상단 라벨"/>
+          <p:cNvSpPr txBox="1"/>
+          <p:nvPr/>
+        </p:nvSpPr>
+        <p:spPr>
+          <a:xfrm>
+            <a:off x="640080" y="237744"/>
+            <a:ext cx="5486400" cy="274320"/>
+          </a:xfrm>
+          <a:prstGeom prst="rect">
+            <a:avLst/>
+          </a:prstGeom>
+          <a:noFill/>
+        </p:spPr>
+        <p:txBody>
+          <a:bodyPr wrap="square" lIns="54864" rIns="54864" tIns="27432" bIns="27432" anchor="ctr">
+            <a:noAutofit/>
+          </a:bodyPr>
+          <a:lstStyle/>
+          <a:p>
+            <a:pPr algn="l">
+              <a:lnSpc>
+                <a:spcPct val="115000"/>
+              </a:lnSpc>
+            </a:pPr>
+            <a:r>
+              <a:rPr sz="900" b="1" i="0" spc="250">
+                <a:solidFill>
+                  <a:srgbClr val="26231F"/>
+                </a:solidFill>
+              </a:rPr>
+              <a:t>FIRST BIRTHDAY</a:t>
+            </a:r>
+          </a:p>
+        </p:txBody>
+      </p:sp>
+      <p:sp>
+        <p:nvSpPr>
+          <p:cNvPr id="6" name="포인트"/>
+          <p:cNvSpPr/>
+          <p:nvPr/>
+        </p:nvSpPr>
+        <p:spPr>
+          <a:xfrm>
+            <a:off x="11204143" y="246888"/>
+            <a:ext cx="237744" cy="237744"/>
+          </a:xfrm>
+          <a:prstGeom prst="moon">
+            <a:avLst/>
+          </a:prstGeom>
+          <a:solidFill>
+            <a:srgbClr val="98CFE1"/>
           </a:solidFill>
           <a:ln>
             <a:noFill/>
@@ -4244,8 +4532,8 @@
         </p:nvSpPr>
         <p:spPr>
           <a:xfrm>
-            <a:off x="640080" y="411480"/>
-            <a:ext cx="8412242" cy="822960"/>
+            <a:off x="640080" y="731520"/>
+            <a:ext cx="10911535" cy="822960"/>
           </a:xfrm>
         </p:spPr>
         <p:txBody>
@@ -4262,7 +4550,7 @@
             <a:r>
               <a:rPr sz="3000" b="1" i="0">
                 <a:solidFill>
-                  <a:srgbClr val="FFFFFF"/>
+                  <a:srgbClr val="26231F"/>
                 </a:solidFill>
               </a:rPr>
               <a:t>한 해 성장 기록</a:t>
@@ -4272,20 +4560,20 @@
       </p:sp>
       <p:sp>
         <p:nvSpPr>
-          <p:cNvPr id="4" name="타임라인 선"/>
+          <p:cNvPr id="7" name="타임라인 선"/>
           <p:cNvSpPr/>
           <p:nvPr/>
         </p:nvSpPr>
         <p:spPr>
           <a:xfrm>
-            <a:off x="640080" y="3383280"/>
+            <a:off x="640080" y="3520440"/>
             <a:ext cx="10911535" cy="54864"/>
           </a:xfrm>
           <a:prstGeom prst="rect">
             <a:avLst/>
           </a:prstGeom>
           <a:solidFill>
-            <a:srgbClr val="D6E5EA"/>
+            <a:srgbClr val="D5EEF6"/>
           </a:solidFill>
           <a:ln>
             <a:noFill/>
@@ -4301,20 +4589,20 @@
       </p:sp>
       <p:sp>
         <p:nvSpPr>
-          <p:cNvPr id="5" name="때 1"/>
+          <p:cNvPr id="8" name="때 1"/>
           <p:cNvSpPr/>
           <p:nvPr/>
         </p:nvSpPr>
         <p:spPr>
           <a:xfrm>
-            <a:off x="1530065" y="3200400"/>
+            <a:off x="1530065" y="3337560"/>
             <a:ext cx="402336" cy="402336"/>
           </a:xfrm>
           <a:prstGeom prst="ellipse">
             <a:avLst/>
           </a:prstGeom>
           <a:solidFill>
-            <a:srgbClr val="497483"/>
+            <a:srgbClr val="98CFE1"/>
           </a:solidFill>
           <a:ln w="38100">
             <a:solidFill>
@@ -4332,13 +4620,13 @@
       </p:sp>
       <p:sp>
         <p:nvSpPr>
-          <p:cNvPr id="6" name="TextBox 5"/>
+          <p:cNvPr id="9" name="TextBox 8"/>
           <p:cNvSpPr txBox="1"/>
           <p:nvPr/>
         </p:nvSpPr>
         <p:spPr>
           <a:xfrm>
-            <a:off x="685800" y="2560320"/>
+            <a:off x="685800" y="2697480"/>
             <a:ext cx="2090867" cy="457200"/>
           </a:xfrm>
           <a:prstGeom prst="rect">
@@ -4360,7 +4648,7 @@
             <a:r>
               <a:rPr sz="1400" b="1" i="0">
                 <a:solidFill>
-                  <a:srgbClr val="497483"/>
+                  <a:srgbClr val="98CFE1"/>
                 </a:solidFill>
               </a:rPr>
               <a:t>1개월</a:t>
@@ -4370,13 +4658,13 @@
       </p:sp>
       <p:sp>
         <p:nvSpPr>
-          <p:cNvPr id="7" name="TextBox 6"/>
+          <p:cNvPr id="10" name="TextBox 9"/>
           <p:cNvSpPr txBox="1"/>
           <p:nvPr/>
         </p:nvSpPr>
         <p:spPr>
           <a:xfrm>
-            <a:off x="731519" y="3749039"/>
+            <a:off x="731519" y="3886200"/>
             <a:ext cx="1999427" cy="457200"/>
           </a:xfrm>
           <a:prstGeom prst="rect">
@@ -4398,7 +4686,7 @@
             <a:r>
               <a:rPr sz="1600" b="1" i="0">
                 <a:solidFill>
-                  <a:srgbClr val="253A41"/>
+                  <a:srgbClr val="274149"/>
                 </a:solidFill>
               </a:rPr>
               <a:t>처음 눈을 맞춘 날</a:t>
@@ -4408,13 +4696,13 @@
       </p:sp>
       <p:sp>
         <p:nvSpPr>
-          <p:cNvPr id="8" name="TextBox 7"/>
+          <p:cNvPr id="11" name="TextBox 10"/>
           <p:cNvSpPr txBox="1"/>
           <p:nvPr/>
         </p:nvSpPr>
         <p:spPr>
           <a:xfrm>
-            <a:off x="731519" y="4251960"/>
+            <a:off x="731519" y="4389120"/>
             <a:ext cx="1999427" cy="1645920"/>
           </a:xfrm>
           <a:prstGeom prst="rect">
@@ -4436,7 +4724,7 @@
             <a:r>
               <a:rPr sz="1300" b="0" i="0">
                 <a:solidFill>
-                  <a:srgbClr val="2B2B2B"/>
+                  <a:srgbClr val="26231F"/>
                 </a:solidFill>
               </a:rPr>
               <a:t>기억을 적어 주세요</a:t>
@@ -4446,20 +4734,20 @@
       </p:sp>
       <p:sp>
         <p:nvSpPr>
-          <p:cNvPr id="9" name="때 2"/>
+          <p:cNvPr id="12" name="때 2"/>
           <p:cNvSpPr/>
           <p:nvPr/>
         </p:nvSpPr>
         <p:spPr>
           <a:xfrm>
-            <a:off x="3712372" y="3200400"/>
+            <a:off x="3712372" y="3337560"/>
             <a:ext cx="402336" cy="402336"/>
           </a:xfrm>
           <a:prstGeom prst="ellipse">
             <a:avLst/>
           </a:prstGeom>
           <a:solidFill>
-            <a:srgbClr val="497483"/>
+            <a:srgbClr val="98CFE1"/>
           </a:solidFill>
           <a:ln w="38100">
             <a:solidFill>
@@ -4477,13 +4765,13 @@
       </p:sp>
       <p:sp>
         <p:nvSpPr>
-          <p:cNvPr id="10" name="TextBox 9"/>
+          <p:cNvPr id="13" name="TextBox 12"/>
           <p:cNvSpPr txBox="1"/>
           <p:nvPr/>
         </p:nvSpPr>
         <p:spPr>
           <a:xfrm>
-            <a:off x="2868107" y="2560320"/>
+            <a:off x="2868107" y="2697480"/>
             <a:ext cx="2090867" cy="457200"/>
           </a:xfrm>
           <a:prstGeom prst="rect">
@@ -4505,7 +4793,7 @@
             <a:r>
               <a:rPr sz="1400" b="1" i="0">
                 <a:solidFill>
-                  <a:srgbClr val="497483"/>
+                  <a:srgbClr val="98CFE1"/>
                 </a:solidFill>
               </a:rPr>
               <a:t>3개월</a:t>
@@ -4515,13 +4803,13 @@
       </p:sp>
       <p:sp>
         <p:nvSpPr>
-          <p:cNvPr id="11" name="TextBox 10"/>
+          <p:cNvPr id="14" name="TextBox 13"/>
           <p:cNvSpPr txBox="1"/>
           <p:nvPr/>
         </p:nvSpPr>
         <p:spPr>
           <a:xfrm>
-            <a:off x="2913827" y="3749039"/>
+            <a:off x="2913827" y="3886200"/>
             <a:ext cx="1999427" cy="457200"/>
           </a:xfrm>
           <a:prstGeom prst="rect">
@@ -4543,7 +4831,7 @@
             <a:r>
               <a:rPr sz="1600" b="1" i="0">
                 <a:solidFill>
-                  <a:srgbClr val="253A41"/>
+                  <a:srgbClr val="274149"/>
                 </a:solidFill>
               </a:rPr>
               <a:t>처음 웃은 날</a:t>
@@ -4553,13 +4841,13 @@
       </p:sp>
       <p:sp>
         <p:nvSpPr>
-          <p:cNvPr id="12" name="TextBox 11"/>
+          <p:cNvPr id="15" name="TextBox 14"/>
           <p:cNvSpPr txBox="1"/>
           <p:nvPr/>
         </p:nvSpPr>
         <p:spPr>
           <a:xfrm>
-            <a:off x="2913827" y="4251960"/>
+            <a:off x="2913827" y="4389120"/>
             <a:ext cx="1999427" cy="1645920"/>
           </a:xfrm>
           <a:prstGeom prst="rect">
@@ -4581,7 +4869,7 @@
             <a:r>
               <a:rPr sz="1300" b="0" i="0">
                 <a:solidFill>
-                  <a:srgbClr val="2B2B2B"/>
+                  <a:srgbClr val="26231F"/>
                 </a:solidFill>
               </a:rPr>
               <a:t>기억을 적어 주세요</a:t>
@@ -4591,20 +4879,20 @@
       </p:sp>
       <p:sp>
         <p:nvSpPr>
-          <p:cNvPr id="13" name="때 3"/>
+          <p:cNvPr id="16" name="때 3"/>
           <p:cNvSpPr/>
           <p:nvPr/>
         </p:nvSpPr>
         <p:spPr>
           <a:xfrm>
-            <a:off x="5894679" y="3200400"/>
+            <a:off x="5894679" y="3337560"/>
             <a:ext cx="402336" cy="402336"/>
           </a:xfrm>
           <a:prstGeom prst="ellipse">
             <a:avLst/>
           </a:prstGeom>
           <a:solidFill>
-            <a:srgbClr val="497483"/>
+            <a:srgbClr val="98CFE1"/>
           </a:solidFill>
           <a:ln w="38100">
             <a:solidFill>
@@ -4622,13 +4910,13 @@
       </p:sp>
       <p:sp>
         <p:nvSpPr>
-          <p:cNvPr id="14" name="TextBox 13"/>
+          <p:cNvPr id="17" name="TextBox 16"/>
           <p:cNvSpPr txBox="1"/>
           <p:nvPr/>
         </p:nvSpPr>
         <p:spPr>
           <a:xfrm>
-            <a:off x="5050414" y="2560320"/>
+            <a:off x="5050414" y="2697480"/>
             <a:ext cx="2090867" cy="457200"/>
           </a:xfrm>
           <a:prstGeom prst="rect">
@@ -4650,7 +4938,7 @@
             <a:r>
               <a:rPr sz="1400" b="1" i="0">
                 <a:solidFill>
-                  <a:srgbClr val="497483"/>
+                  <a:srgbClr val="98CFE1"/>
                 </a:solidFill>
               </a:rPr>
               <a:t>6개월</a:t>
@@ -4660,13 +4948,13 @@
       </p:sp>
       <p:sp>
         <p:nvSpPr>
-          <p:cNvPr id="15" name="TextBox 14"/>
+          <p:cNvPr id="18" name="TextBox 17"/>
           <p:cNvSpPr txBox="1"/>
           <p:nvPr/>
         </p:nvSpPr>
         <p:spPr>
           <a:xfrm>
-            <a:off x="5096134" y="3749039"/>
+            <a:off x="5096134" y="3886200"/>
             <a:ext cx="1999427" cy="457200"/>
           </a:xfrm>
           <a:prstGeom prst="rect">
@@ -4688,7 +4976,7 @@
             <a:r>
               <a:rPr sz="1600" b="1" i="0">
                 <a:solidFill>
-                  <a:srgbClr val="253A41"/>
+                  <a:srgbClr val="274149"/>
                 </a:solidFill>
               </a:rPr>
               <a:t>뒤집기 성공</a:t>
@@ -4698,13 +4986,13 @@
       </p:sp>
       <p:sp>
         <p:nvSpPr>
-          <p:cNvPr id="16" name="TextBox 15"/>
+          <p:cNvPr id="19" name="TextBox 18"/>
           <p:cNvSpPr txBox="1"/>
           <p:nvPr/>
         </p:nvSpPr>
         <p:spPr>
           <a:xfrm>
-            <a:off x="5096134" y="4251960"/>
+            <a:off x="5096134" y="4389120"/>
             <a:ext cx="1999427" cy="1645920"/>
           </a:xfrm>
           <a:prstGeom prst="rect">
@@ -4726,7 +5014,7 @@
             <a:r>
               <a:rPr sz="1300" b="0" i="0">
                 <a:solidFill>
-                  <a:srgbClr val="2B2B2B"/>
+                  <a:srgbClr val="26231F"/>
                 </a:solidFill>
               </a:rPr>
               <a:t>기억을 적어 주세요</a:t>
@@ -4736,20 +5024,20 @@
       </p:sp>
       <p:sp>
         <p:nvSpPr>
-          <p:cNvPr id="17" name="때 4"/>
+          <p:cNvPr id="20" name="때 4"/>
           <p:cNvSpPr/>
           <p:nvPr/>
         </p:nvSpPr>
         <p:spPr>
           <a:xfrm>
-            <a:off x="8076986" y="3200400"/>
+            <a:off x="8076986" y="3337560"/>
             <a:ext cx="402336" cy="402336"/>
           </a:xfrm>
           <a:prstGeom prst="ellipse">
             <a:avLst/>
           </a:prstGeom>
           <a:solidFill>
-            <a:srgbClr val="497483"/>
+            <a:srgbClr val="98CFE1"/>
           </a:solidFill>
           <a:ln w="38100">
             <a:solidFill>
@@ -4767,13 +5055,13 @@
       </p:sp>
       <p:sp>
         <p:nvSpPr>
-          <p:cNvPr id="18" name="TextBox 17"/>
+          <p:cNvPr id="21" name="TextBox 20"/>
           <p:cNvSpPr txBox="1"/>
           <p:nvPr/>
         </p:nvSpPr>
         <p:spPr>
           <a:xfrm>
-            <a:off x="7232721" y="2560320"/>
+            <a:off x="7232721" y="2697480"/>
             <a:ext cx="2090867" cy="457200"/>
           </a:xfrm>
           <a:prstGeom prst="rect">
@@ -4795,7 +5083,7 @@
             <a:r>
               <a:rPr sz="1400" b="1" i="0">
                 <a:solidFill>
-                  <a:srgbClr val="497483"/>
+                  <a:srgbClr val="98CFE1"/>
                 </a:solidFill>
               </a:rPr>
               <a:t>9개월</a:t>
@@ -4805,13 +5093,13 @@
       </p:sp>
       <p:sp>
         <p:nvSpPr>
-          <p:cNvPr id="19" name="TextBox 18"/>
+          <p:cNvPr id="22" name="TextBox 21"/>
           <p:cNvSpPr txBox="1"/>
           <p:nvPr/>
         </p:nvSpPr>
         <p:spPr>
           <a:xfrm>
-            <a:off x="7278441" y="3749039"/>
+            <a:off x="7278441" y="3886200"/>
             <a:ext cx="1999427" cy="457200"/>
           </a:xfrm>
           <a:prstGeom prst="rect">
@@ -4833,7 +5121,7 @@
             <a:r>
               <a:rPr sz="1600" b="1" i="0">
                 <a:solidFill>
-                  <a:srgbClr val="253A41"/>
+                  <a:srgbClr val="274149"/>
                 </a:solidFill>
               </a:rPr>
               <a:t>첫 이유식</a:t>
@@ -4843,13 +5131,13 @@
       </p:sp>
       <p:sp>
         <p:nvSpPr>
-          <p:cNvPr id="20" name="TextBox 19"/>
+          <p:cNvPr id="23" name="TextBox 22"/>
           <p:cNvSpPr txBox="1"/>
           <p:nvPr/>
         </p:nvSpPr>
         <p:spPr>
           <a:xfrm>
-            <a:off x="7278441" y="4251960"/>
+            <a:off x="7278441" y="4389120"/>
             <a:ext cx="1999427" cy="1645920"/>
           </a:xfrm>
           <a:prstGeom prst="rect">
@@ -4871,7 +5159,7 @@
             <a:r>
               <a:rPr sz="1300" b="0" i="0">
                 <a:solidFill>
-                  <a:srgbClr val="2B2B2B"/>
+                  <a:srgbClr val="26231F"/>
                 </a:solidFill>
               </a:rPr>
               <a:t>기억을 적어 주세요</a:t>
@@ -4881,20 +5169,20 @@
       </p:sp>
       <p:sp>
         <p:nvSpPr>
-          <p:cNvPr id="21" name="때 5"/>
+          <p:cNvPr id="24" name="때 5"/>
           <p:cNvSpPr/>
           <p:nvPr/>
         </p:nvSpPr>
         <p:spPr>
           <a:xfrm>
-            <a:off x="10259293" y="3200400"/>
+            <a:off x="10259293" y="3337560"/>
             <a:ext cx="402336" cy="402336"/>
           </a:xfrm>
           <a:prstGeom prst="ellipse">
             <a:avLst/>
           </a:prstGeom>
           <a:solidFill>
-            <a:srgbClr val="497483"/>
+            <a:srgbClr val="98CFE1"/>
           </a:solidFill>
           <a:ln w="38100">
             <a:solidFill>
@@ -4912,13 +5200,13 @@
       </p:sp>
       <p:sp>
         <p:nvSpPr>
-          <p:cNvPr id="22" name="TextBox 21"/>
+          <p:cNvPr id="25" name="TextBox 24"/>
           <p:cNvSpPr txBox="1"/>
           <p:nvPr/>
         </p:nvSpPr>
         <p:spPr>
           <a:xfrm>
-            <a:off x="9415028" y="2560320"/>
+            <a:off x="9415028" y="2697480"/>
             <a:ext cx="2090867" cy="457200"/>
           </a:xfrm>
           <a:prstGeom prst="rect">
@@ -4940,7 +5228,7 @@
             <a:r>
               <a:rPr sz="1400" b="1" i="0">
                 <a:solidFill>
-                  <a:srgbClr val="497483"/>
+                  <a:srgbClr val="98CFE1"/>
                 </a:solidFill>
               </a:rPr>
               <a:t>12개월</a:t>
@@ -4950,13 +5238,13 @@
       </p:sp>
       <p:sp>
         <p:nvSpPr>
-          <p:cNvPr id="23" name="TextBox 22"/>
+          <p:cNvPr id="26" name="TextBox 25"/>
           <p:cNvSpPr txBox="1"/>
           <p:nvPr/>
         </p:nvSpPr>
         <p:spPr>
           <a:xfrm>
-            <a:off x="9460748" y="3749039"/>
+            <a:off x="9460748" y="3886200"/>
             <a:ext cx="1999427" cy="457200"/>
           </a:xfrm>
           <a:prstGeom prst="rect">
@@ -4978,7 +5266,7 @@
             <a:r>
               <a:rPr sz="1600" b="1" i="0">
                 <a:solidFill>
-                  <a:srgbClr val="253A41"/>
+                  <a:srgbClr val="274149"/>
                 </a:solidFill>
               </a:rPr>
               <a:t>첫 걸음</a:t>
@@ -4988,13 +5276,13 @@
       </p:sp>
       <p:sp>
         <p:nvSpPr>
-          <p:cNvPr id="24" name="TextBox 23"/>
+          <p:cNvPr id="27" name="TextBox 26"/>
           <p:cNvSpPr txBox="1"/>
           <p:nvPr/>
         </p:nvSpPr>
         <p:spPr>
           <a:xfrm>
-            <a:off x="9460748" y="4251960"/>
+            <a:off x="9460748" y="4389120"/>
             <a:ext cx="1999427" cy="1645920"/>
           </a:xfrm>
           <a:prstGeom prst="rect">
@@ -5016,7 +5304,7 @@
             <a:r>
               <a:rPr sz="1300" b="0" i="0">
                 <a:solidFill>
-                  <a:srgbClr val="2B2B2B"/>
+                  <a:srgbClr val="26231F"/>
                 </a:solidFill>
               </a:rPr>
               <a:t>기억을 적어 주세요</a:t>
@@ -5058,14 +5346,110 @@
         </p:nvSpPr>
         <p:spPr>
           <a:xfrm>
-            <a:off x="0" y="384048"/>
-            <a:ext cx="9509522" cy="896112"/>
-          </a:xfrm>
-          <a:prstGeom prst="homePlate">
+            <a:off x="0" y="6565392"/>
+            <a:ext cx="12191695" cy="292608"/>
+          </a:xfrm>
+          <a:prstGeom prst="rect">
             <a:avLst/>
           </a:prstGeom>
           <a:solidFill>
-            <a:srgbClr val="497483"/>
+            <a:srgbClr val="ADDBEB"/>
+          </a:solidFill>
+          <a:ln>
+            <a:noFill/>
+          </a:ln>
+        </p:spPr>
+        <p:txBody>
+          <a:bodyPr rtlCol="0" anchor="ctr"/>
+          <a:lstStyle/>
+          <a:p>
+            <a:pPr algn="ctr"/>
+          </a:p>
+        </p:txBody>
+      </p:sp>
+      <p:sp>
+        <p:nvSpPr>
+          <p:cNvPr id="4" name="장식"/>
+          <p:cNvSpPr/>
+          <p:nvPr/>
+        </p:nvSpPr>
+        <p:spPr>
+          <a:xfrm>
+            <a:off x="640080" y="566928"/>
+            <a:ext cx="10911535" cy="10972"/>
+          </a:xfrm>
+          <a:prstGeom prst="rect">
+            <a:avLst/>
+          </a:prstGeom>
+          <a:solidFill>
+            <a:srgbClr val="26231F"/>
+          </a:solidFill>
+          <a:ln>
+            <a:noFill/>
+          </a:ln>
+        </p:spPr>
+        <p:txBody>
+          <a:bodyPr rtlCol="0" anchor="ctr"/>
+          <a:lstStyle/>
+          <a:p>
+            <a:pPr algn="ctr"/>
+          </a:p>
+        </p:txBody>
+      </p:sp>
+      <p:sp>
+        <p:nvSpPr>
+          <p:cNvPr id="5" name="상단 라벨"/>
+          <p:cNvSpPr txBox="1"/>
+          <p:nvPr/>
+        </p:nvSpPr>
+        <p:spPr>
+          <a:xfrm>
+            <a:off x="640080" y="237744"/>
+            <a:ext cx="5486400" cy="274320"/>
+          </a:xfrm>
+          <a:prstGeom prst="rect">
+            <a:avLst/>
+          </a:prstGeom>
+          <a:noFill/>
+        </p:spPr>
+        <p:txBody>
+          <a:bodyPr wrap="square" lIns="54864" rIns="54864" tIns="27432" bIns="27432" anchor="ctr">
+            <a:noAutofit/>
+          </a:bodyPr>
+          <a:lstStyle/>
+          <a:p>
+            <a:pPr algn="l">
+              <a:lnSpc>
+                <a:spcPct val="115000"/>
+              </a:lnSpc>
+            </a:pPr>
+            <a:r>
+              <a:rPr sz="900" b="1" i="0" spc="250">
+                <a:solidFill>
+                  <a:srgbClr val="26231F"/>
+                </a:solidFill>
+              </a:rPr>
+              <a:t>FIRST BIRTHDAY</a:t>
+            </a:r>
+          </a:p>
+        </p:txBody>
+      </p:sp>
+      <p:sp>
+        <p:nvSpPr>
+          <p:cNvPr id="6" name="포인트"/>
+          <p:cNvSpPr/>
+          <p:nvPr/>
+        </p:nvSpPr>
+        <p:spPr>
+          <a:xfrm>
+            <a:off x="11204143" y="246888"/>
+            <a:ext cx="237744" cy="237744"/>
+          </a:xfrm>
+          <a:prstGeom prst="moon">
+            <a:avLst/>
+          </a:prstGeom>
+          <a:solidFill>
+            <a:srgbClr val="98CFE1"/>
           </a:solidFill>
           <a:ln>
             <a:noFill/>
@@ -5091,8 +5475,8 @@
         </p:nvSpPr>
         <p:spPr>
           <a:xfrm>
-            <a:off x="640080" y="411480"/>
-            <a:ext cx="8412242" cy="822960"/>
+            <a:off x="640080" y="731520"/>
+            <a:ext cx="10911535" cy="822960"/>
           </a:xfrm>
         </p:spPr>
         <p:txBody>
@@ -5109,7 +5493,7 @@
             <a:r>
               <a:rPr sz="3000" b="1" i="0">
                 <a:solidFill>
-                  <a:srgbClr val="FFFFFF"/>
+                  <a:srgbClr val="26231F"/>
                 </a:solidFill>
               </a:rPr>
               <a:t>키와 몸무게</a:t>
@@ -5119,14 +5503,14 @@
       </p:sp>
       <p:graphicFrame>
         <p:nvGraphicFramePr>
-          <p:cNvPr id="4" name="표"/>
+          <p:cNvPr id="7" name="표"/>
           <p:cNvGraphicFramePr>
             <a:graphicFrameLocks noGrp="1"/>
           </p:cNvGraphicFramePr>
           <p:nvPr/>
         </p:nvGraphicFramePr>
         <p:xfrm>
-          <a:off x="640080" y="1645920"/>
+          <a:off x="640080" y="1783080"/>
           <a:ext cx="10911535" cy="3291840"/>
         </p:xfrm>
         <a:graphic>
@@ -5152,7 +5536,7 @@
                       <a:r>
                         <a:rPr sz="1600" b="1">
                           <a:solidFill>
-                            <a:srgbClr val="FFFFFF"/>
+                            <a:srgbClr val="26231F"/>
                           </a:solidFill>
                         </a:rPr>
                         <a:t/>
@@ -5162,30 +5546,30 @@
                   <a:tcPr anchor="ctr" marL="73152" marR="73152">
                     <a:lnL w="9525" cap="flat" cmpd="sng" algn="ctr">
                       <a:solidFill>
-                        <a:srgbClr val="497483"/>
+                        <a:srgbClr val="98CFE1"/>
                       </a:solidFill>
                       <a:prstDash val="solid"/>
                     </a:lnL>
                     <a:lnR w="9525" cap="flat" cmpd="sng" algn="ctr">
                       <a:solidFill>
-                        <a:srgbClr val="497483"/>
+                        <a:srgbClr val="98CFE1"/>
                       </a:solidFill>
                       <a:prstDash val="solid"/>
                     </a:lnR>
                     <a:lnT w="9525" cap="flat" cmpd="sng" algn="ctr">
                       <a:solidFill>
-                        <a:srgbClr val="497483"/>
+                        <a:srgbClr val="98CFE1"/>
                       </a:solidFill>
                       <a:prstDash val="solid"/>
                     </a:lnT>
                     <a:lnB w="9525" cap="flat" cmpd="sng" algn="ctr">
                       <a:solidFill>
-                        <a:srgbClr val="497483"/>
+                        <a:srgbClr val="98CFE1"/>
                       </a:solidFill>
                       <a:prstDash val="solid"/>
                     </a:lnB>
                     <a:solidFill>
-                      <a:srgbClr val="497483"/>
+                      <a:srgbClr val="98CFE1"/>
                     </a:solidFill>
                   </a:tcPr>
                 </a:tc>
@@ -5198,7 +5582,7 @@
                       <a:r>
                         <a:rPr sz="1600" b="1">
                           <a:solidFill>
-                            <a:srgbClr val="FFFFFF"/>
+                            <a:srgbClr val="26231F"/>
                           </a:solidFill>
                         </a:rPr>
                         <a:t>3개월</a:t>
@@ -5208,30 +5592,30 @@
                   <a:tcPr anchor="ctr" marL="73152" marR="73152">
                     <a:lnL w="9525" cap="flat" cmpd="sng" algn="ctr">
                       <a:solidFill>
-                        <a:srgbClr val="497483"/>
+                        <a:srgbClr val="98CFE1"/>
                       </a:solidFill>
                       <a:prstDash val="solid"/>
                     </a:lnL>
                     <a:lnR w="9525" cap="flat" cmpd="sng" algn="ctr">
                       <a:solidFill>
-                        <a:srgbClr val="497483"/>
+                        <a:srgbClr val="98CFE1"/>
                       </a:solidFill>
                       <a:prstDash val="solid"/>
                     </a:lnR>
                     <a:lnT w="9525" cap="flat" cmpd="sng" algn="ctr">
                       <a:solidFill>
-                        <a:srgbClr val="497483"/>
+                        <a:srgbClr val="98CFE1"/>
                       </a:solidFill>
                       <a:prstDash val="solid"/>
                     </a:lnT>
                     <a:lnB w="9525" cap="flat" cmpd="sng" algn="ctr">
                       <a:solidFill>
-                        <a:srgbClr val="497483"/>
+                        <a:srgbClr val="98CFE1"/>
                       </a:solidFill>
                       <a:prstDash val="solid"/>
                     </a:lnB>
                     <a:solidFill>
-                      <a:srgbClr val="497483"/>
+                      <a:srgbClr val="98CFE1"/>
                     </a:solidFill>
                   </a:tcPr>
                 </a:tc>
@@ -5244,7 +5628,7 @@
                       <a:r>
                         <a:rPr sz="1600" b="1">
                           <a:solidFill>
-                            <a:srgbClr val="FFFFFF"/>
+                            <a:srgbClr val="26231F"/>
                           </a:solidFill>
                         </a:rPr>
                         <a:t>6개월</a:t>
@@ -5254,30 +5638,30 @@
                   <a:tcPr anchor="ctr" marL="73152" marR="73152">
                     <a:lnL w="9525" cap="flat" cmpd="sng" algn="ctr">
                       <a:solidFill>
-                        <a:srgbClr val="497483"/>
+                        <a:srgbClr val="98CFE1"/>
                       </a:solidFill>
                       <a:prstDash val="solid"/>
                     </a:lnL>
                     <a:lnR w="9525" cap="flat" cmpd="sng" algn="ctr">
                       <a:solidFill>
-                        <a:srgbClr val="497483"/>
+                        <a:srgbClr val="98CFE1"/>
                       </a:solidFill>
                       <a:prstDash val="solid"/>
                     </a:lnR>
                     <a:lnT w="9525" cap="flat" cmpd="sng" algn="ctr">
                       <a:solidFill>
-                        <a:srgbClr val="497483"/>
+                        <a:srgbClr val="98CFE1"/>
                       </a:solidFill>
                       <a:prstDash val="solid"/>
                     </a:lnT>
                     <a:lnB w="9525" cap="flat" cmpd="sng" algn="ctr">
                       <a:solidFill>
-                        <a:srgbClr val="497483"/>
+                        <a:srgbClr val="98CFE1"/>
                       </a:solidFill>
                       <a:prstDash val="solid"/>
                     </a:lnB>
                     <a:solidFill>
-                      <a:srgbClr val="497483"/>
+                      <a:srgbClr val="98CFE1"/>
                     </a:solidFill>
                   </a:tcPr>
                 </a:tc>
@@ -5290,7 +5674,7 @@
                       <a:r>
                         <a:rPr sz="1600" b="1">
                           <a:solidFill>
-                            <a:srgbClr val="FFFFFF"/>
+                            <a:srgbClr val="26231F"/>
                           </a:solidFill>
                         </a:rPr>
                         <a:t>9개월</a:t>
@@ -5300,30 +5684,30 @@
                   <a:tcPr anchor="ctr" marL="73152" marR="73152">
                     <a:lnL w="9525" cap="flat" cmpd="sng" algn="ctr">
                       <a:solidFill>
-                        <a:srgbClr val="497483"/>
+                        <a:srgbClr val="98CFE1"/>
                       </a:solidFill>
                       <a:prstDash val="solid"/>
                     </a:lnL>
                     <a:lnR w="9525" cap="flat" cmpd="sng" algn="ctr">
                       <a:solidFill>
-                        <a:srgbClr val="497483"/>
+                        <a:srgbClr val="98CFE1"/>
                       </a:solidFill>
                       <a:prstDash val="solid"/>
                     </a:lnR>
                     <a:lnT w="9525" cap="flat" cmpd="sng" algn="ctr">
                       <a:solidFill>
-                        <a:srgbClr val="497483"/>
+                        <a:srgbClr val="98CFE1"/>
                       </a:solidFill>
                       <a:prstDash val="solid"/>
                     </a:lnT>
                     <a:lnB w="9525" cap="flat" cmpd="sng" algn="ctr">
                       <a:solidFill>
-                        <a:srgbClr val="497483"/>
+                        <a:srgbClr val="98CFE1"/>
                       </a:solidFill>
                       <a:prstDash val="solid"/>
                     </a:lnB>
                     <a:solidFill>
-                      <a:srgbClr val="497483"/>
+                      <a:srgbClr val="98CFE1"/>
                     </a:solidFill>
                   </a:tcPr>
                 </a:tc>
@@ -5336,7 +5720,7 @@
                       <a:r>
                         <a:rPr sz="1600" b="1">
                           <a:solidFill>
-                            <a:srgbClr val="FFFFFF"/>
+                            <a:srgbClr val="26231F"/>
                           </a:solidFill>
                         </a:rPr>
                         <a:t>12개월</a:t>
@@ -5346,30 +5730,30 @@
                   <a:tcPr anchor="ctr" marL="73152" marR="73152">
                     <a:lnL w="9525" cap="flat" cmpd="sng" algn="ctr">
                       <a:solidFill>
-                        <a:srgbClr val="497483"/>
+                        <a:srgbClr val="98CFE1"/>
                       </a:solidFill>
                       <a:prstDash val="solid"/>
                     </a:lnL>
                     <a:lnR w="9525" cap="flat" cmpd="sng" algn="ctr">
                       <a:solidFill>
-                        <a:srgbClr val="497483"/>
+                        <a:srgbClr val="98CFE1"/>
                       </a:solidFill>
                       <a:prstDash val="solid"/>
                     </a:lnR>
                     <a:lnT w="9525" cap="flat" cmpd="sng" algn="ctr">
                       <a:solidFill>
-                        <a:srgbClr val="497483"/>
+                        <a:srgbClr val="98CFE1"/>
                       </a:solidFill>
                       <a:prstDash val="solid"/>
                     </a:lnT>
                     <a:lnB w="9525" cap="flat" cmpd="sng" algn="ctr">
                       <a:solidFill>
-                        <a:srgbClr val="497483"/>
+                        <a:srgbClr val="98CFE1"/>
                       </a:solidFill>
                       <a:prstDash val="solid"/>
                     </a:lnB>
                     <a:solidFill>
-                      <a:srgbClr val="497483"/>
+                      <a:srgbClr val="98CFE1"/>
                     </a:solidFill>
                   </a:tcPr>
                 </a:tc>
@@ -5384,7 +5768,7 @@
                       <a:r>
                         <a:rPr sz="1600" b="1">
                           <a:solidFill>
-                            <a:srgbClr val="253A41"/>
+                            <a:srgbClr val="274149"/>
                           </a:solidFill>
                         </a:rPr>
                         <a:t>키(cm)</a:t>
@@ -5394,30 +5778,30 @@
                   <a:tcPr anchor="ctr" marL="73152" marR="73152">
                     <a:lnL w="9525" cap="flat" cmpd="sng" algn="ctr">
                       <a:solidFill>
-                        <a:srgbClr val="D6E5EA"/>
+                        <a:srgbClr val="D5EEF6"/>
                       </a:solidFill>
                       <a:prstDash val="solid"/>
                     </a:lnL>
                     <a:lnR w="9525" cap="flat" cmpd="sng" algn="ctr">
                       <a:solidFill>
-                        <a:srgbClr val="D6E5EA"/>
+                        <a:srgbClr val="D5EEF6"/>
                       </a:solidFill>
                       <a:prstDash val="solid"/>
                     </a:lnR>
                     <a:lnT w="9525" cap="flat" cmpd="sng" algn="ctr">
                       <a:solidFill>
-                        <a:srgbClr val="D6E5EA"/>
+                        <a:srgbClr val="D5EEF6"/>
                       </a:solidFill>
                       <a:prstDash val="solid"/>
                     </a:lnT>
                     <a:lnB w="9525" cap="flat" cmpd="sng" algn="ctr">
                       <a:solidFill>
-                        <a:srgbClr val="D6E5EA"/>
+                        <a:srgbClr val="D5EEF6"/>
                       </a:solidFill>
                       <a:prstDash val="solid"/>
                     </a:lnB>
                     <a:solidFill>
-                      <a:srgbClr val="D6E5EA"/>
+                      <a:srgbClr val="D5EEF6"/>
                     </a:solidFill>
                   </a:tcPr>
                 </a:tc>
@@ -5430,7 +5814,7 @@
                       <a:r>
                         <a:rPr sz="1600" b="0">
                           <a:solidFill>
-                            <a:srgbClr val="2B2B2B"/>
+                            <a:srgbClr val="26231F"/>
                           </a:solidFill>
                         </a:rPr>
                         <a:t/>
@@ -5440,25 +5824,25 @@
                   <a:tcPr anchor="ctr" marL="73152" marR="73152">
                     <a:lnL w="9525" cap="flat" cmpd="sng" algn="ctr">
                       <a:solidFill>
-                        <a:srgbClr val="D6E5EA"/>
+                        <a:srgbClr val="D5EEF6"/>
                       </a:solidFill>
                       <a:prstDash val="solid"/>
                     </a:lnL>
                     <a:lnR w="9525" cap="flat" cmpd="sng" algn="ctr">
                       <a:solidFill>
-                        <a:srgbClr val="D6E5EA"/>
+                        <a:srgbClr val="D5EEF6"/>
                       </a:solidFill>
                       <a:prstDash val="solid"/>
                     </a:lnR>
                     <a:lnT w="9525" cap="flat" cmpd="sng" algn="ctr">
                       <a:solidFill>
-                        <a:srgbClr val="D6E5EA"/>
+                        <a:srgbClr val="D5EEF6"/>
                       </a:solidFill>
                       <a:prstDash val="solid"/>
                     </a:lnT>
                     <a:lnB w="9525" cap="flat" cmpd="sng" algn="ctr">
                       <a:solidFill>
-                        <a:srgbClr val="D6E5EA"/>
+                        <a:srgbClr val="D5EEF6"/>
                       </a:solidFill>
                       <a:prstDash val="solid"/>
                     </a:lnB>
@@ -5476,7 +5860,7 @@
                       <a:r>
                         <a:rPr sz="1600" b="0">
                           <a:solidFill>
-                            <a:srgbClr val="2B2B2B"/>
+                            <a:srgbClr val="26231F"/>
                           </a:solidFill>
                         </a:rPr>
                         <a:t/>
@@ -5486,25 +5870,25 @@
                   <a:tcPr anchor="ctr" marL="73152" marR="73152">
                     <a:lnL w="9525" cap="flat" cmpd="sng" algn="ctr">
                       <a:solidFill>
-                        <a:srgbClr val="D6E5EA"/>
+                        <a:srgbClr val="D5EEF6"/>
                       </a:solidFill>
                       <a:prstDash val="solid"/>
                     </a:lnL>
                     <a:lnR w="9525" cap="flat" cmpd="sng" algn="ctr">
                       <a:solidFill>
-                        <a:srgbClr val="D6E5EA"/>
+                        <a:srgbClr val="D5EEF6"/>
                       </a:solidFill>
                       <a:prstDash val="solid"/>
                     </a:lnR>
                     <a:lnT w="9525" cap="flat" cmpd="sng" algn="ctr">
                       <a:solidFill>
-                        <a:srgbClr val="D6E5EA"/>
+                        <a:srgbClr val="D5EEF6"/>
                       </a:solidFill>
                       <a:prstDash val="solid"/>
                     </a:lnT>
                     <a:lnB w="9525" cap="flat" cmpd="sng" algn="ctr">
                       <a:solidFill>
-                        <a:srgbClr val="D6E5EA"/>
+                        <a:srgbClr val="D5EEF6"/>
                       </a:solidFill>
                       <a:prstDash val="solid"/>
                     </a:lnB>
@@ -5522,7 +5906,7 @@
                       <a:r>
                         <a:rPr sz="1600" b="0">
                           <a:solidFill>
-                            <a:srgbClr val="2B2B2B"/>
+                            <a:srgbClr val="26231F"/>
                           </a:solidFill>
                         </a:rPr>
                         <a:t/>
@@ -5532,25 +5916,25 @@
                   <a:tcPr anchor="ctr" marL="73152" marR="73152">
                     <a:lnL w="9525" cap="flat" cmpd="sng" algn="ctr">
                       <a:solidFill>
-                        <a:srgbClr val="D6E5EA"/>
+                        <a:srgbClr val="D5EEF6"/>
                       </a:solidFill>
                       <a:prstDash val="solid"/>
                     </a:lnL>
                     <a:lnR w="9525" cap="flat" cmpd="sng" algn="ctr">
                       <a:solidFill>
-                        <a:srgbClr val="D6E5EA"/>
+                        <a:srgbClr val="D5EEF6"/>
                       </a:solidFill>
                       <a:prstDash val="solid"/>
                     </a:lnR>
                     <a:lnT w="9525" cap="flat" cmpd="sng" algn="ctr">
                       <a:solidFill>
-                        <a:srgbClr val="D6E5EA"/>
+                        <a:srgbClr val="D5EEF6"/>
                       </a:solidFill>
                       <a:prstDash val="solid"/>
                     </a:lnT>
                     <a:lnB w="9525" cap="flat" cmpd="sng" algn="ctr">
                       <a:solidFill>
-                        <a:srgbClr val="D6E5EA"/>
+                        <a:srgbClr val="D5EEF6"/>
                       </a:solidFill>
                       <a:prstDash val="solid"/>
                     </a:lnB>
@@ -5568,7 +5952,7 @@
                       <a:r>
                         <a:rPr sz="1600" b="0">
                           <a:solidFill>
-                            <a:srgbClr val="2B2B2B"/>
+                            <a:srgbClr val="26231F"/>
                           </a:solidFill>
                         </a:rPr>
                         <a:t/>
@@ -5578,25 +5962,25 @@
                   <a:tcPr anchor="ctr" marL="73152" marR="73152">
                     <a:lnL w="9525" cap="flat" cmpd="sng" algn="ctr">
                       <a:solidFill>
-                        <a:srgbClr val="D6E5EA"/>
+                        <a:srgbClr val="D5EEF6"/>
                       </a:solidFill>
                       <a:prstDash val="solid"/>
                     </a:lnL>
                     <a:lnR w="9525" cap="flat" cmpd="sng" algn="ctr">
                       <a:solidFill>
-                        <a:srgbClr val="D6E5EA"/>
+                        <a:srgbClr val="D5EEF6"/>
                       </a:solidFill>
                       <a:prstDash val="solid"/>
                     </a:lnR>
                     <a:lnT w="9525" cap="flat" cmpd="sng" algn="ctr">
                       <a:solidFill>
-                        <a:srgbClr val="D6E5EA"/>
+                        <a:srgbClr val="D5EEF6"/>
                       </a:solidFill>
                       <a:prstDash val="solid"/>
                     </a:lnT>
                     <a:lnB w="9525" cap="flat" cmpd="sng" algn="ctr">
                       <a:solidFill>
-                        <a:srgbClr val="D6E5EA"/>
+                        <a:srgbClr val="D5EEF6"/>
                       </a:solidFill>
                       <a:prstDash val="solid"/>
                     </a:lnB>
@@ -5616,7 +6000,7 @@
                       <a:r>
                         <a:rPr sz="1600" b="1">
                           <a:solidFill>
-                            <a:srgbClr val="253A41"/>
+                            <a:srgbClr val="274149"/>
                           </a:solidFill>
                         </a:rPr>
                         <a:t>몸무게(kg)</a:t>
@@ -5626,30 +6010,30 @@
                   <a:tcPr anchor="ctr" marL="73152" marR="73152">
                     <a:lnL w="9525" cap="flat" cmpd="sng" algn="ctr">
                       <a:solidFill>
-                        <a:srgbClr val="D6E5EA"/>
+                        <a:srgbClr val="D5EEF6"/>
                       </a:solidFill>
                       <a:prstDash val="solid"/>
                     </a:lnL>
                     <a:lnR w="9525" cap="flat" cmpd="sng" algn="ctr">
                       <a:solidFill>
-                        <a:srgbClr val="D6E5EA"/>
+                        <a:srgbClr val="D5EEF6"/>
                       </a:solidFill>
                       <a:prstDash val="solid"/>
                     </a:lnR>
                     <a:lnT w="9525" cap="flat" cmpd="sng" algn="ctr">
                       <a:solidFill>
-                        <a:srgbClr val="D6E5EA"/>
+                        <a:srgbClr val="D5EEF6"/>
                       </a:solidFill>
                       <a:prstDash val="solid"/>
                     </a:lnT>
                     <a:lnB w="9525" cap="flat" cmpd="sng" algn="ctr">
                       <a:solidFill>
-                        <a:srgbClr val="D6E5EA"/>
+                        <a:srgbClr val="D5EEF6"/>
                       </a:solidFill>
                       <a:prstDash val="solid"/>
                     </a:lnB>
                     <a:solidFill>
-                      <a:srgbClr val="D6E5EA"/>
+                      <a:srgbClr val="D5EEF6"/>
                     </a:solidFill>
                   </a:tcPr>
                 </a:tc>
@@ -5662,7 +6046,7 @@
                       <a:r>
                         <a:rPr sz="1600" b="0">
                           <a:solidFill>
-                            <a:srgbClr val="2B2B2B"/>
+                            <a:srgbClr val="26231F"/>
                           </a:solidFill>
                         </a:rPr>
                         <a:t/>
@@ -5672,30 +6056,30 @@
                   <a:tcPr anchor="ctr" marL="73152" marR="73152">
                     <a:lnL w="9525" cap="flat" cmpd="sng" algn="ctr">
                       <a:solidFill>
-                        <a:srgbClr val="D6E5EA"/>
+                        <a:srgbClr val="D5EEF6"/>
                       </a:solidFill>
                       <a:prstDash val="solid"/>
                     </a:lnL>
                     <a:lnR w="9525" cap="flat" cmpd="sng" algn="ctr">
                       <a:solidFill>
-                        <a:srgbClr val="D6E5EA"/>
+                        <a:srgbClr val="D5EEF6"/>
                       </a:solidFill>
                       <a:prstDash val="solid"/>
                     </a:lnR>
                     <a:lnT w="9525" cap="flat" cmpd="sng" algn="ctr">
                       <a:solidFill>
-                        <a:srgbClr val="D6E5EA"/>
+                        <a:srgbClr val="D5EEF6"/>
                       </a:solidFill>
                       <a:prstDash val="solid"/>
                     </a:lnT>
                     <a:lnB w="9525" cap="flat" cmpd="sng" algn="ctr">
                       <a:solidFill>
-                        <a:srgbClr val="D6E5EA"/>
+                        <a:srgbClr val="D5EEF6"/>
                       </a:solidFill>
                       <a:prstDash val="solid"/>
                     </a:lnB>
                     <a:solidFill>
-                      <a:srgbClr val="F2F6F8"/>
+                      <a:srgbClr val="ECF7FB"/>
                     </a:solidFill>
                   </a:tcPr>
                 </a:tc>
@@ -5708,7 +6092,7 @@
                       <a:r>
                         <a:rPr sz="1600" b="0">
                           <a:solidFill>
-                            <a:srgbClr val="2B2B2B"/>
+                            <a:srgbClr val="26231F"/>
                           </a:solidFill>
                         </a:rPr>
                         <a:t/>
@@ -5718,30 +6102,30 @@
                   <a:tcPr anchor="ctr" marL="73152" marR="73152">
                     <a:lnL w="9525" cap="flat" cmpd="sng" algn="ctr">
                       <a:solidFill>
-                        <a:srgbClr val="D6E5EA"/>
+                        <a:srgbClr val="D5EEF6"/>
                       </a:solidFill>
                       <a:prstDash val="solid"/>
                     </a:lnL>
                     <a:lnR w="9525" cap="flat" cmpd="sng" algn="ctr">
                       <a:solidFill>
-                        <a:srgbClr val="D6E5EA"/>
+                        <a:srgbClr val="D5EEF6"/>
                       </a:solidFill>
                       <a:prstDash val="solid"/>
                     </a:lnR>
                     <a:lnT w="9525" cap="flat" cmpd="sng" algn="ctr">
                       <a:solidFill>
-                        <a:srgbClr val="D6E5EA"/>
+                        <a:srgbClr val="D5EEF6"/>
                       </a:solidFill>
                       <a:prstDash val="solid"/>
                     </a:lnT>
                     <a:lnB w="9525" cap="flat" cmpd="sng" algn="ctr">
                       <a:solidFill>
-                        <a:srgbClr val="D6E5EA"/>
+                        <a:srgbClr val="D5EEF6"/>
                       </a:solidFill>
                       <a:prstDash val="solid"/>
                     </a:lnB>
                     <a:solidFill>
-                      <a:srgbClr val="F2F6F8"/>
+                      <a:srgbClr val="ECF7FB"/>
                     </a:solidFill>
                   </a:tcPr>
                 </a:tc>
@@ -5754,7 +6138,7 @@
                       <a:r>
                         <a:rPr sz="1600" b="0">
                           <a:solidFill>
-                            <a:srgbClr val="2B2B2B"/>
+                            <a:srgbClr val="26231F"/>
                           </a:solidFill>
                         </a:rPr>
                         <a:t/>
@@ -5764,30 +6148,30 @@
                   <a:tcPr anchor="ctr" marL="73152" marR="73152">
                     <a:lnL w="9525" cap="flat" cmpd="sng" algn="ctr">
                       <a:solidFill>
-                        <a:srgbClr val="D6E5EA"/>
+                        <a:srgbClr val="D5EEF6"/>
                       </a:solidFill>
                       <a:prstDash val="solid"/>
                     </a:lnL>
                     <a:lnR w="9525" cap="flat" cmpd="sng" algn="ctr">
                       <a:solidFill>
-                        <a:srgbClr val="D6E5EA"/>
+                        <a:srgbClr val="D5EEF6"/>
                       </a:solidFill>
                       <a:prstDash val="solid"/>
                     </a:lnR>
                     <a:lnT w="9525" cap="flat" cmpd="sng" algn="ctr">
                       <a:solidFill>
-                        <a:srgbClr val="D6E5EA"/>
+                        <a:srgbClr val="D5EEF6"/>
                       </a:solidFill>
                       <a:prstDash val="solid"/>
                     </a:lnT>
                     <a:lnB w="9525" cap="flat" cmpd="sng" algn="ctr">
                       <a:solidFill>
-                        <a:srgbClr val="D6E5EA"/>
+                        <a:srgbClr val="D5EEF6"/>
                       </a:solidFill>
                       <a:prstDash val="solid"/>
                     </a:lnB>
                     <a:solidFill>
-                      <a:srgbClr val="F2F6F8"/>
+                      <a:srgbClr val="ECF7FB"/>
                     </a:solidFill>
                   </a:tcPr>
                 </a:tc>
@@ -5800,7 +6184,7 @@
                       <a:r>
                         <a:rPr sz="1600" b="0">
                           <a:solidFill>
-                            <a:srgbClr val="2B2B2B"/>
+                            <a:srgbClr val="26231F"/>
                           </a:solidFill>
                         </a:rPr>
                         <a:t/>
@@ -5810,30 +6194,30 @@
                   <a:tcPr anchor="ctr" marL="73152" marR="73152">
                     <a:lnL w="9525" cap="flat" cmpd="sng" algn="ctr">
                       <a:solidFill>
-                        <a:srgbClr val="D6E5EA"/>
+                        <a:srgbClr val="D5EEF6"/>
                       </a:solidFill>
                       <a:prstDash val="solid"/>
                     </a:lnL>
                     <a:lnR w="9525" cap="flat" cmpd="sng" algn="ctr">
                       <a:solidFill>
-                        <a:srgbClr val="D6E5EA"/>
+                        <a:srgbClr val="D5EEF6"/>
                       </a:solidFill>
                       <a:prstDash val="solid"/>
                     </a:lnR>
                     <a:lnT w="9525" cap="flat" cmpd="sng" algn="ctr">
                       <a:solidFill>
-                        <a:srgbClr val="D6E5EA"/>
+                        <a:srgbClr val="D5EEF6"/>
                       </a:solidFill>
                       <a:prstDash val="solid"/>
                     </a:lnT>
                     <a:lnB w="9525" cap="flat" cmpd="sng" algn="ctr">
                       <a:solidFill>
-                        <a:srgbClr val="D6E5EA"/>
+                        <a:srgbClr val="D5EEF6"/>
                       </a:solidFill>
                       <a:prstDash val="solid"/>
                     </a:lnB>
                     <a:solidFill>
-                      <a:srgbClr val="F2F6F8"/>
+                      <a:srgbClr val="ECF7FB"/>
                     </a:solidFill>
                   </a:tcPr>
                 </a:tc>
@@ -5848,7 +6232,7 @@
                       <a:r>
                         <a:rPr sz="1600" b="1">
                           <a:solidFill>
-                            <a:srgbClr val="253A41"/>
+                            <a:srgbClr val="274149"/>
                           </a:solidFill>
                         </a:rPr>
                         <a:t>새로 한 것</a:t>
@@ -5858,30 +6242,30 @@
                   <a:tcPr anchor="ctr" marL="73152" marR="73152">
                     <a:lnL w="9525" cap="flat" cmpd="sng" algn="ctr">
                       <a:solidFill>
-                        <a:srgbClr val="D6E5EA"/>
+                        <a:srgbClr val="D5EEF6"/>
                       </a:solidFill>
                       <a:prstDash val="solid"/>
                     </a:lnL>
                     <a:lnR w="9525" cap="flat" cmpd="sng" algn="ctr">
                       <a:solidFill>
-                        <a:srgbClr val="D6E5EA"/>
+                        <a:srgbClr val="D5EEF6"/>
                       </a:solidFill>
                       <a:prstDash val="solid"/>
                     </a:lnR>
                     <a:lnT w="9525" cap="flat" cmpd="sng" algn="ctr">
                       <a:solidFill>
-                        <a:srgbClr val="D6E5EA"/>
+                        <a:srgbClr val="D5EEF6"/>
                       </a:solidFill>
                       <a:prstDash val="solid"/>
                     </a:lnT>
                     <a:lnB w="9525" cap="flat" cmpd="sng" algn="ctr">
                       <a:solidFill>
-                        <a:srgbClr val="D6E5EA"/>
+                        <a:srgbClr val="D5EEF6"/>
                       </a:solidFill>
                       <a:prstDash val="solid"/>
                     </a:lnB>
                     <a:solidFill>
-                      <a:srgbClr val="D6E5EA"/>
+                      <a:srgbClr val="D5EEF6"/>
                     </a:solidFill>
                   </a:tcPr>
                 </a:tc>
@@ -5894,7 +6278,7 @@
                       <a:r>
                         <a:rPr sz="1600" b="0">
                           <a:solidFill>
-                            <a:srgbClr val="2B2B2B"/>
+                            <a:srgbClr val="26231F"/>
                           </a:solidFill>
                         </a:rPr>
                         <a:t/>
@@ -5904,25 +6288,25 @@
                   <a:tcPr anchor="ctr" marL="73152" marR="73152">
                     <a:lnL w="9525" cap="flat" cmpd="sng" algn="ctr">
                       <a:solidFill>
-                        <a:srgbClr val="D6E5EA"/>
+                        <a:srgbClr val="D5EEF6"/>
                       </a:solidFill>
                       <a:prstDash val="solid"/>
                     </a:lnL>
                     <a:lnR w="9525" cap="flat" cmpd="sng" algn="ctr">
                       <a:solidFill>
-                        <a:srgbClr val="D6E5EA"/>
+                        <a:srgbClr val="D5EEF6"/>
                       </a:solidFill>
                       <a:prstDash val="solid"/>
                     </a:lnR>
                     <a:lnT w="9525" cap="flat" cmpd="sng" algn="ctr">
                       <a:solidFill>
-                        <a:srgbClr val="D6E5EA"/>
+                        <a:srgbClr val="D5EEF6"/>
                       </a:solidFill>
                       <a:prstDash val="solid"/>
                     </a:lnT>
                     <a:lnB w="9525" cap="flat" cmpd="sng" algn="ctr">
                       <a:solidFill>
-                        <a:srgbClr val="D6E5EA"/>
+                        <a:srgbClr val="D5EEF6"/>
                       </a:solidFill>
                       <a:prstDash val="solid"/>
                     </a:lnB>
@@ -5940,7 +6324,7 @@
                       <a:r>
                         <a:rPr sz="1600" b="0">
                           <a:solidFill>
-                            <a:srgbClr val="2B2B2B"/>
+                            <a:srgbClr val="26231F"/>
                           </a:solidFill>
                         </a:rPr>
                         <a:t/>
@@ -5950,25 +6334,25 @@
                   <a:tcPr anchor="ctr" marL="73152" marR="73152">
                     <a:lnL w="9525" cap="flat" cmpd="sng" algn="ctr">
                       <a:solidFill>
-                        <a:srgbClr val="D6E5EA"/>
+                        <a:srgbClr val="D5EEF6"/>
                       </a:solidFill>
                       <a:prstDash val="solid"/>
                     </a:lnL>
                     <a:lnR w="9525" cap="flat" cmpd="sng" algn="ctr">
                       <a:solidFill>
-                        <a:srgbClr val="D6E5EA"/>
+                        <a:srgbClr val="D5EEF6"/>
                       </a:solidFill>
                       <a:prstDash val="solid"/>
                     </a:lnR>
                     <a:lnT w="9525" cap="flat" cmpd="sng" algn="ctr">
                       <a:solidFill>
-                        <a:srgbClr val="D6E5EA"/>
+                        <a:srgbClr val="D5EEF6"/>
                       </a:solidFill>
                       <a:prstDash val="solid"/>
                     </a:lnT>
                     <a:lnB w="9525" cap="flat" cmpd="sng" algn="ctr">
                       <a:solidFill>
-                        <a:srgbClr val="D6E5EA"/>
+                        <a:srgbClr val="D5EEF6"/>
                       </a:solidFill>
                       <a:prstDash val="solid"/>
                     </a:lnB>
@@ -5986,7 +6370,7 @@
                       <a:r>
                         <a:rPr sz="1600" b="0">
                           <a:solidFill>
-                            <a:srgbClr val="2B2B2B"/>
+                            <a:srgbClr val="26231F"/>
                           </a:solidFill>
                         </a:rPr>
                         <a:t/>
@@ -5996,25 +6380,25 @@
                   <a:tcPr anchor="ctr" marL="73152" marR="73152">
                     <a:lnL w="9525" cap="flat" cmpd="sng" algn="ctr">
                       <a:solidFill>
-                        <a:srgbClr val="D6E5EA"/>
+                        <a:srgbClr val="D5EEF6"/>
                       </a:solidFill>
                       <a:prstDash val="solid"/>
                     </a:lnL>
                     <a:lnR w="9525" cap="flat" cmpd="sng" algn="ctr">
                       <a:solidFill>
-                        <a:srgbClr val="D6E5EA"/>
+                        <a:srgbClr val="D5EEF6"/>
                       </a:solidFill>
                       <a:prstDash val="solid"/>
                     </a:lnR>
                     <a:lnT w="9525" cap="flat" cmpd="sng" algn="ctr">
                       <a:solidFill>
-                        <a:srgbClr val="D6E5EA"/>
+                        <a:srgbClr val="D5EEF6"/>
                       </a:solidFill>
                       <a:prstDash val="solid"/>
                     </a:lnT>
                     <a:lnB w="9525" cap="flat" cmpd="sng" algn="ctr">
                       <a:solidFill>
-                        <a:srgbClr val="D6E5EA"/>
+                        <a:srgbClr val="D5EEF6"/>
                       </a:solidFill>
                       <a:prstDash val="solid"/>
                     </a:lnB>
@@ -6032,7 +6416,7 @@
                       <a:r>
                         <a:rPr sz="1600" b="0">
                           <a:solidFill>
-                            <a:srgbClr val="2B2B2B"/>
+                            <a:srgbClr val="26231F"/>
                           </a:solidFill>
                         </a:rPr>
                         <a:t/>
@@ -6042,25 +6426,25 @@
                   <a:tcPr anchor="ctr" marL="73152" marR="73152">
                     <a:lnL w="9525" cap="flat" cmpd="sng" algn="ctr">
                       <a:solidFill>
-                        <a:srgbClr val="D6E5EA"/>
+                        <a:srgbClr val="D5EEF6"/>
                       </a:solidFill>
                       <a:prstDash val="solid"/>
                     </a:lnL>
                     <a:lnR w="9525" cap="flat" cmpd="sng" algn="ctr">
                       <a:solidFill>
-                        <a:srgbClr val="D6E5EA"/>
+                        <a:srgbClr val="D5EEF6"/>
                       </a:solidFill>
                       <a:prstDash val="solid"/>
                     </a:lnR>
                     <a:lnT w="9525" cap="flat" cmpd="sng" algn="ctr">
                       <a:solidFill>
-                        <a:srgbClr val="D6E5EA"/>
+                        <a:srgbClr val="D5EEF6"/>
                       </a:solidFill>
                       <a:prstDash val="solid"/>
                     </a:lnT>
                     <a:lnB w="9525" cap="flat" cmpd="sng" algn="ctr">
                       <a:solidFill>
-                        <a:srgbClr val="D6E5EA"/>
+                        <a:srgbClr val="D5EEF6"/>
                       </a:solidFill>
                       <a:prstDash val="solid"/>
                     </a:lnB>
@@ -6108,14 +6492,110 @@
         </p:nvSpPr>
         <p:spPr>
           <a:xfrm>
-            <a:off x="0" y="384048"/>
-            <a:ext cx="9509522" cy="896112"/>
-          </a:xfrm>
-          <a:prstGeom prst="homePlate">
+            <a:off x="0" y="6565392"/>
+            <a:ext cx="12191695" cy="292608"/>
+          </a:xfrm>
+          <a:prstGeom prst="rect">
             <a:avLst/>
           </a:prstGeom>
           <a:solidFill>
-            <a:srgbClr val="497483"/>
+            <a:srgbClr val="ADDBEB"/>
+          </a:solidFill>
+          <a:ln>
+            <a:noFill/>
+          </a:ln>
+        </p:spPr>
+        <p:txBody>
+          <a:bodyPr rtlCol="0" anchor="ctr"/>
+          <a:lstStyle/>
+          <a:p>
+            <a:pPr algn="ctr"/>
+          </a:p>
+        </p:txBody>
+      </p:sp>
+      <p:sp>
+        <p:nvSpPr>
+          <p:cNvPr id="4" name="장식"/>
+          <p:cNvSpPr/>
+          <p:nvPr/>
+        </p:nvSpPr>
+        <p:spPr>
+          <a:xfrm>
+            <a:off x="640080" y="566928"/>
+            <a:ext cx="10911535" cy="10972"/>
+          </a:xfrm>
+          <a:prstGeom prst="rect">
+            <a:avLst/>
+          </a:prstGeom>
+          <a:solidFill>
+            <a:srgbClr val="26231F"/>
+          </a:solidFill>
+          <a:ln>
+            <a:noFill/>
+          </a:ln>
+        </p:spPr>
+        <p:txBody>
+          <a:bodyPr rtlCol="0" anchor="ctr"/>
+          <a:lstStyle/>
+          <a:p>
+            <a:pPr algn="ctr"/>
+          </a:p>
+        </p:txBody>
+      </p:sp>
+      <p:sp>
+        <p:nvSpPr>
+          <p:cNvPr id="5" name="상단 라벨"/>
+          <p:cNvSpPr txBox="1"/>
+          <p:nvPr/>
+        </p:nvSpPr>
+        <p:spPr>
+          <a:xfrm>
+            <a:off x="640080" y="237744"/>
+            <a:ext cx="5486400" cy="274320"/>
+          </a:xfrm>
+          <a:prstGeom prst="rect">
+            <a:avLst/>
+          </a:prstGeom>
+          <a:noFill/>
+        </p:spPr>
+        <p:txBody>
+          <a:bodyPr wrap="square" lIns="54864" rIns="54864" tIns="27432" bIns="27432" anchor="ctr">
+            <a:noAutofit/>
+          </a:bodyPr>
+          <a:lstStyle/>
+          <a:p>
+            <a:pPr algn="l">
+              <a:lnSpc>
+                <a:spcPct val="115000"/>
+              </a:lnSpc>
+            </a:pPr>
+            <a:r>
+              <a:rPr sz="900" b="1" i="0" spc="250">
+                <a:solidFill>
+                  <a:srgbClr val="26231F"/>
+                </a:solidFill>
+              </a:rPr>
+              <a:t>FIRST BIRTHDAY</a:t>
+            </a:r>
+          </a:p>
+        </p:txBody>
+      </p:sp>
+      <p:sp>
+        <p:nvSpPr>
+          <p:cNvPr id="6" name="포인트"/>
+          <p:cNvSpPr/>
+          <p:nvPr/>
+        </p:nvSpPr>
+        <p:spPr>
+          <a:xfrm>
+            <a:off x="11204143" y="246888"/>
+            <a:ext cx="237744" cy="237744"/>
+          </a:xfrm>
+          <a:prstGeom prst="moon">
+            <a:avLst/>
+          </a:prstGeom>
+          <a:solidFill>
+            <a:srgbClr val="98CFE1"/>
           </a:solidFill>
           <a:ln>
             <a:noFill/>
@@ -6141,8 +6621,8 @@
         </p:nvSpPr>
         <p:spPr>
           <a:xfrm>
-            <a:off x="640080" y="411480"/>
-            <a:ext cx="8412242" cy="822960"/>
+            <a:off x="640080" y="731520"/>
+            <a:ext cx="10911535" cy="822960"/>
           </a:xfrm>
         </p:spPr>
         <p:txBody>
@@ -6159,7 +6639,7 @@
             <a:r>
               <a:rPr sz="3000" b="1" i="0">
                 <a:solidFill>
-                  <a:srgbClr val="FFFFFF"/>
+                  <a:srgbClr val="26231F"/>
                 </a:solidFill>
               </a:rPr>
               <a:t>사진 모음</a:t>
@@ -6169,14 +6649,14 @@
       </p:sp>
       <p:sp>
         <p:nvSpPr>
-          <p:cNvPr id="4" name="사진 자리"/>
+          <p:cNvPr id="7" name="사진 자리"/>
           <p:cNvSpPr/>
           <p:nvPr/>
         </p:nvSpPr>
         <p:spPr>
           <a:xfrm>
-            <a:off x="640080" y="1645920"/>
-            <a:ext cx="2590723" cy="2286000"/>
+            <a:off x="640080" y="1783080"/>
+            <a:ext cx="2590723" cy="2103120"/>
           </a:xfrm>
           <a:prstGeom prst="roundRect">
             <a:avLst>
@@ -6184,12 +6664,10 @@
             </a:avLst>
           </a:prstGeom>
           <a:solidFill>
-            <a:srgbClr val="D6E5EA"/>
+            <a:srgbClr val="D5EEF6"/>
           </a:solidFill>
           <a:ln w="19050">
-            <a:solidFill>
-              <a:srgbClr val="497483"/>
-            </a:solidFill>
+            <a:noFill/>
             <a:prstDash val="dash"/>
           </a:ln>
         </p:spPr>
@@ -6207,7 +6685,7 @@
             <a:r>
               <a:rPr sz="1200" b="0" i="0">
                 <a:solidFill>
-                  <a:srgbClr val="253A41"/>
+                  <a:srgbClr val="8E8780"/>
                 </a:solidFill>
               </a:rPr>
               <a:t>사진 1</a:t>
@@ -6217,14 +6695,14 @@
       </p:sp>
       <p:sp>
         <p:nvSpPr>
-          <p:cNvPr id="5" name="사진 자리"/>
+          <p:cNvPr id="8" name="사진 자리"/>
           <p:cNvSpPr/>
           <p:nvPr/>
         </p:nvSpPr>
         <p:spPr>
           <a:xfrm>
-            <a:off x="3413683" y="1645920"/>
-            <a:ext cx="2590723" cy="2286000"/>
+            <a:off x="3413683" y="1783080"/>
+            <a:ext cx="2590723" cy="2103120"/>
           </a:xfrm>
           <a:prstGeom prst="roundRect">
             <a:avLst>
@@ -6232,12 +6710,10 @@
             </a:avLst>
           </a:prstGeom>
           <a:solidFill>
-            <a:srgbClr val="D6E5EA"/>
+            <a:srgbClr val="D5EEF6"/>
           </a:solidFill>
           <a:ln w="19050">
-            <a:solidFill>
-              <a:srgbClr val="497483"/>
-            </a:solidFill>
+            <a:noFill/>
             <a:prstDash val="dash"/>
           </a:ln>
         </p:spPr>
@@ -6255,7 +6731,7 @@
             <a:r>
               <a:rPr sz="1200" b="0" i="0">
                 <a:solidFill>
-                  <a:srgbClr val="253A41"/>
+                  <a:srgbClr val="8E8780"/>
                 </a:solidFill>
               </a:rPr>
               <a:t>사진 2</a:t>
@@ -6265,14 +6741,14 @@
       </p:sp>
       <p:sp>
         <p:nvSpPr>
-          <p:cNvPr id="6" name="사진 자리"/>
+          <p:cNvPr id="9" name="사진 자리"/>
           <p:cNvSpPr/>
           <p:nvPr/>
         </p:nvSpPr>
         <p:spPr>
           <a:xfrm>
-            <a:off x="6187287" y="1645920"/>
-            <a:ext cx="2590723" cy="2286000"/>
+            <a:off x="6187287" y="1783080"/>
+            <a:ext cx="2590723" cy="2103120"/>
           </a:xfrm>
           <a:prstGeom prst="roundRect">
             <a:avLst>
@@ -6280,12 +6756,10 @@
             </a:avLst>
           </a:prstGeom>
           <a:solidFill>
-            <a:srgbClr val="D6E5EA"/>
+            <a:srgbClr val="D5EEF6"/>
           </a:solidFill>
           <a:ln w="19050">
-            <a:solidFill>
-              <a:srgbClr val="497483"/>
-            </a:solidFill>
+            <a:noFill/>
             <a:prstDash val="dash"/>
           </a:ln>
         </p:spPr>
@@ -6303,7 +6777,7 @@
             <a:r>
               <a:rPr sz="1200" b="0" i="0">
                 <a:solidFill>
-                  <a:srgbClr val="253A41"/>
+                  <a:srgbClr val="8E8780"/>
                 </a:solidFill>
               </a:rPr>
               <a:t>사진 3</a:t>
@@ -6313,14 +6787,14 @@
       </p:sp>
       <p:sp>
         <p:nvSpPr>
-          <p:cNvPr id="7" name="사진 자리"/>
+          <p:cNvPr id="10" name="사진 자리"/>
           <p:cNvSpPr/>
           <p:nvPr/>
         </p:nvSpPr>
         <p:spPr>
           <a:xfrm>
-            <a:off x="8960891" y="1645920"/>
-            <a:ext cx="2590723" cy="2286000"/>
+            <a:off x="8960891" y="1783080"/>
+            <a:ext cx="2590723" cy="2103120"/>
           </a:xfrm>
           <a:prstGeom prst="roundRect">
             <a:avLst>
@@ -6328,12 +6802,10 @@
             </a:avLst>
           </a:prstGeom>
           <a:solidFill>
-            <a:srgbClr val="D6E5EA"/>
+            <a:srgbClr val="D5EEF6"/>
           </a:solidFill>
           <a:ln w="19050">
-            <a:solidFill>
-              <a:srgbClr val="497483"/>
-            </a:solidFill>
+            <a:noFill/>
             <a:prstDash val="dash"/>
           </a:ln>
         </p:spPr>
@@ -6351,7 +6823,7 @@
             <a:r>
               <a:rPr sz="1200" b="0" i="0">
                 <a:solidFill>
-                  <a:srgbClr val="253A41"/>
+                  <a:srgbClr val="8E8780"/>
                 </a:solidFill>
               </a:rPr>
               <a:t>사진 4</a:t>
@@ -6361,14 +6833,14 @@
       </p:sp>
       <p:sp>
         <p:nvSpPr>
-          <p:cNvPr id="8" name="사진 자리"/>
+          <p:cNvPr id="11" name="사진 자리"/>
           <p:cNvSpPr/>
           <p:nvPr/>
         </p:nvSpPr>
         <p:spPr>
           <a:xfrm>
-            <a:off x="640080" y="4114800"/>
-            <a:ext cx="2590723" cy="2286000"/>
+            <a:off x="640080" y="4069080"/>
+            <a:ext cx="2590723" cy="2103120"/>
           </a:xfrm>
           <a:prstGeom prst="roundRect">
             <a:avLst>
@@ -6376,12 +6848,10 @@
             </a:avLst>
           </a:prstGeom>
           <a:solidFill>
-            <a:srgbClr val="D6E5EA"/>
+            <a:srgbClr val="D5EEF6"/>
           </a:solidFill>
           <a:ln w="19050">
-            <a:solidFill>
-              <a:srgbClr val="497483"/>
-            </a:solidFill>
+            <a:noFill/>
             <a:prstDash val="dash"/>
           </a:ln>
         </p:spPr>
@@ -6399,7 +6869,7 @@
             <a:r>
               <a:rPr sz="1200" b="0" i="0">
                 <a:solidFill>
-                  <a:srgbClr val="253A41"/>
+                  <a:srgbClr val="8E8780"/>
                 </a:solidFill>
               </a:rPr>
               <a:t>사진 5</a:t>
@@ -6409,14 +6879,14 @@
       </p:sp>
       <p:sp>
         <p:nvSpPr>
-          <p:cNvPr id="9" name="사진 자리"/>
+          <p:cNvPr id="12" name="사진 자리"/>
           <p:cNvSpPr/>
           <p:nvPr/>
         </p:nvSpPr>
         <p:spPr>
           <a:xfrm>
-            <a:off x="3413683" y="4114800"/>
-            <a:ext cx="2590723" cy="2286000"/>
+            <a:off x="3413683" y="4069080"/>
+            <a:ext cx="2590723" cy="2103120"/>
           </a:xfrm>
           <a:prstGeom prst="roundRect">
             <a:avLst>
@@ -6424,12 +6894,10 @@
             </a:avLst>
           </a:prstGeom>
           <a:solidFill>
-            <a:srgbClr val="D6E5EA"/>
+            <a:srgbClr val="D5EEF6"/>
           </a:solidFill>
           <a:ln w="19050">
-            <a:solidFill>
-              <a:srgbClr val="497483"/>
-            </a:solidFill>
+            <a:noFill/>
             <a:prstDash val="dash"/>
           </a:ln>
         </p:spPr>
@@ -6447,7 +6915,7 @@
             <a:r>
               <a:rPr sz="1200" b="0" i="0">
                 <a:solidFill>
-                  <a:srgbClr val="253A41"/>
+                  <a:srgbClr val="8E8780"/>
                 </a:solidFill>
               </a:rPr>
               <a:t>사진 6</a:t>
@@ -6457,14 +6925,14 @@
       </p:sp>
       <p:sp>
         <p:nvSpPr>
-          <p:cNvPr id="10" name="사진 자리"/>
+          <p:cNvPr id="13" name="사진 자리"/>
           <p:cNvSpPr/>
           <p:nvPr/>
         </p:nvSpPr>
         <p:spPr>
           <a:xfrm>
-            <a:off x="6187287" y="4114800"/>
-            <a:ext cx="2590723" cy="2286000"/>
+            <a:off x="6187287" y="4069080"/>
+            <a:ext cx="2590723" cy="2103120"/>
           </a:xfrm>
           <a:prstGeom prst="roundRect">
             <a:avLst>
@@ -6472,12 +6940,10 @@
             </a:avLst>
           </a:prstGeom>
           <a:solidFill>
-            <a:srgbClr val="D6E5EA"/>
+            <a:srgbClr val="D5EEF6"/>
           </a:solidFill>
           <a:ln w="19050">
-            <a:solidFill>
-              <a:srgbClr val="497483"/>
-            </a:solidFill>
+            <a:noFill/>
             <a:prstDash val="dash"/>
           </a:ln>
         </p:spPr>
@@ -6495,7 +6961,7 @@
             <a:r>
               <a:rPr sz="1200" b="0" i="0">
                 <a:solidFill>
-                  <a:srgbClr val="253A41"/>
+                  <a:srgbClr val="8E8780"/>
                 </a:solidFill>
               </a:rPr>
               <a:t>사진 7</a:t>
@@ -6505,14 +6971,14 @@
       </p:sp>
       <p:sp>
         <p:nvSpPr>
-          <p:cNvPr id="11" name="사진 자리"/>
+          <p:cNvPr id="14" name="사진 자리"/>
           <p:cNvSpPr/>
           <p:nvPr/>
         </p:nvSpPr>
         <p:spPr>
           <a:xfrm>
-            <a:off x="8960891" y="4114800"/>
-            <a:ext cx="2590723" cy="2286000"/>
+            <a:off x="8960891" y="4069080"/>
+            <a:ext cx="2590723" cy="2103120"/>
           </a:xfrm>
           <a:prstGeom prst="roundRect">
             <a:avLst>
@@ -6520,12 +6986,10 @@
             </a:avLst>
           </a:prstGeom>
           <a:solidFill>
-            <a:srgbClr val="D6E5EA"/>
+            <a:srgbClr val="D5EEF6"/>
           </a:solidFill>
           <a:ln w="19050">
-            <a:solidFill>
-              <a:srgbClr val="497483"/>
-            </a:solidFill>
+            <a:noFill/>
             <a:prstDash val="dash"/>
           </a:ln>
         </p:spPr>
@@ -6543,7 +7007,7 @@
             <a:r>
               <a:rPr sz="1200" b="0" i="0">
                 <a:solidFill>
-                  <a:srgbClr val="253A41"/>
+                  <a:srgbClr val="8E8780"/>
                 </a:solidFill>
               </a:rPr>
               <a:t>사진 8</a:t>
@@ -6562,6 +7026,14 @@
 <file path=ppt/slides/slide6.xml><?xml version="1.0" encoding="utf-8"?>
 <p:sld xmlns:a="http://schemas.openxmlformats.org/drawingml/2006/main" xmlns:p="http://schemas.openxmlformats.org/presentationml/2006/main" xmlns:r="http://schemas.openxmlformats.org/officeDocument/2006/relationships">
   <p:cSld>
+    <p:bg>
+      <p:bgPr>
+        <a:solidFill>
+          <a:srgbClr val="D5EEF6"/>
+        </a:solidFill>
+        <a:effectLst/>
+      </p:bgPr>
+    </p:bg>
     <p:spTree>
       <p:nvGrpSpPr>
         <p:cNvPr id="1" name=""/>
@@ -6569,30 +7041,120 @@
         <p:nvPr/>
       </p:nvGrpSpPr>
       <p:grpSpPr/>
-      <p:pic>
-        <p:nvPicPr>
-          <p:cNvPr id="3" name="표지 그림" descr="birthday-46.jpg"/>
-          <p:cNvPicPr>
-            <a:picLocks noChangeAspect="1"/>
-          </p:cNvPicPr>
+      <p:sp>
+        <p:nvSpPr>
+          <p:cNvPr id="3" name="사진 자리"/>
+          <p:cNvSpPr/>
           <p:nvPr/>
-        </p:nvPicPr>
-        <p:blipFill>
-          <a:blip r:embed="rId2"/>
-          <a:stretch>
-            <a:fillRect/>
-          </a:stretch>
-        </p:blipFill>
-        <p:spPr>
-          <a:xfrm>
-            <a:off x="0" y="0"/>
-            <a:ext cx="12191695" cy="6858000"/>
+        </p:nvSpPr>
+        <p:spPr>
+          <a:xfrm>
+            <a:off x="7071183" y="960120"/>
+            <a:ext cx="3657508" cy="4526280"/>
+          </a:xfrm>
+          <a:prstGeom prst="roundRect">
+            <a:avLst>
+              <a:gd name="adj" fmla="val 4000"/>
+            </a:avLst>
+          </a:prstGeom>
+          <a:solidFill>
+            <a:srgbClr val="ADDBEB"/>
+          </a:solidFill>
+          <a:ln>
+            <a:noFill/>
+          </a:ln>
+        </p:spPr>
+        <p:txBody>
+          <a:bodyPr rtlCol="0" anchor="ctr" wrap="square" lIns="54864" rIns="54864" tIns="27432" bIns="27432">
+            <a:noAutofit/>
+          </a:bodyPr>
+          <a:lstStyle/>
+          <a:p>
+            <a:pPr algn="ctr">
+              <a:lnSpc>
+                <a:spcPct val="100000"/>
+              </a:lnSpc>
+            </a:pPr>
+            <a:r>
+              <a:rPr sz="1400" b="0" i="0">
+                <a:solidFill>
+                  <a:srgbClr val="274149"/>
+                </a:solidFill>
+              </a:rPr>
+              <a:t>사진을 넣어 주세요</a:t>
+            </a:r>
+          </a:p>
+        </p:txBody>
+      </p:sp>
+      <p:sp>
+        <p:nvSpPr>
+          <p:cNvPr id="4" name="장식"/>
+          <p:cNvSpPr/>
+          <p:nvPr/>
+        </p:nvSpPr>
+        <p:spPr>
+          <a:xfrm>
+            <a:off x="7558851" y="1234439"/>
+            <a:ext cx="3657508" cy="4526280"/>
+          </a:xfrm>
+          <a:prstGeom prst="roundRect">
+            <a:avLst>
+              <a:gd name="adj" fmla="val 4000"/>
+            </a:avLst>
+          </a:prstGeom>
+          <a:noFill/>
+          <a:ln w="9525">
+            <a:solidFill>
+              <a:srgbClr val="26231F"/>
+            </a:solidFill>
+          </a:ln>
+        </p:spPr>
+        <p:txBody>
+          <a:bodyPr rtlCol="0" anchor="ctr"/>
+          <a:lstStyle/>
+          <a:p>
+            <a:pPr algn="ctr"/>
+          </a:p>
+        </p:txBody>
+      </p:sp>
+      <p:sp>
+        <p:nvSpPr>
+          <p:cNvPr id="5" name="라벨"/>
+          <p:cNvSpPr txBox="1"/>
+          <p:nvPr/>
+        </p:nvSpPr>
+        <p:spPr>
+          <a:xfrm>
+            <a:off x="822960" y="2148840"/>
+            <a:ext cx="5608179" cy="274320"/>
           </a:xfrm>
           <a:prstGeom prst="rect">
             <a:avLst/>
           </a:prstGeom>
-        </p:spPr>
-      </p:pic>
+          <a:noFill/>
+        </p:spPr>
+        <p:txBody>
+          <a:bodyPr wrap="square" lIns="54864" rIns="54864" tIns="27432" bIns="27432" anchor="t">
+            <a:noAutofit/>
+          </a:bodyPr>
+          <a:lstStyle/>
+          <a:p>
+            <a:pPr algn="l">
+              <a:lnSpc>
+                <a:spcPct val="115000"/>
+              </a:lnSpc>
+            </a:pPr>
+            <a:r>
+              <a:rPr sz="1000" b="1" i="0" spc="250">
+                <a:solidFill>
+                  <a:srgbClr val="26231F"/>
+                </a:solidFill>
+              </a:rPr>
+              <a:t>FIRST BIRTHDAY</a:t>
+            </a:r>
+          </a:p>
+        </p:txBody>
+      </p:sp>
       <p:sp>
         <p:nvSpPr>
           <p:cNvPr id="2" name="Title 1"/>
@@ -6605,8 +7167,8 @@
         </p:nvSpPr>
         <p:spPr>
           <a:xfrm>
-            <a:off x="853418" y="2057400"/>
-            <a:ext cx="6095847" cy="1554480"/>
+            <a:off x="822960" y="2606040"/>
+            <a:ext cx="5608179" cy="1188720"/>
           </a:xfrm>
         </p:spPr>
         <p:txBody>
@@ -6623,7 +7185,7 @@
             <a:r>
               <a:rPr sz="3400" b="1" i="0">
                 <a:solidFill>
-                  <a:srgbClr val="253A41"/>
+                  <a:srgbClr val="26231F"/>
                 </a:solidFill>
               </a:rPr>
               <a:t>와 주셔서 고맙습니다</a:t>
@@ -6633,14 +7195,14 @@
       </p:sp>
       <p:sp>
         <p:nvSpPr>
-          <p:cNvPr id="4" name="한 줄 문구"/>
+          <p:cNvPr id="6" name="한 줄 문구"/>
           <p:cNvSpPr txBox="1"/>
           <p:nvPr/>
         </p:nvSpPr>
         <p:spPr>
           <a:xfrm>
-            <a:off x="853418" y="3749039"/>
-            <a:ext cx="6095847" cy="822960"/>
+            <a:off x="822960" y="3886200"/>
+            <a:ext cx="5608179" cy="822960"/>
           </a:xfrm>
           <a:prstGeom prst="rect">
             <a:avLst/>
@@ -6659,9 +7221,9 @@
               </a:lnSpc>
             </a:pPr>
             <a:r>
-              <a:rPr sz="1700" b="0" i="1">
+              <a:rPr sz="1700" b="0" i="0">
                 <a:solidFill>
-                  <a:srgbClr val="253A41"/>
+                  <a:srgbClr val="26231F"/>
                 </a:solidFill>
               </a:rPr>
               <a:t>아이가 한 살이 되었습니다</a:t>
@@ -6671,14 +7233,14 @@
       </p:sp>
       <p:sp>
         <p:nvSpPr>
-          <p:cNvPr id="5" name="안내 문구"/>
+          <p:cNvPr id="7" name="안내 문구"/>
           <p:cNvSpPr txBox="1"/>
           <p:nvPr/>
         </p:nvSpPr>
         <p:spPr>
           <a:xfrm>
-            <a:off x="853418" y="4617720"/>
-            <a:ext cx="6095847" cy="914400"/>
+            <a:off x="822960" y="4754880"/>
+            <a:ext cx="5608179" cy="914400"/>
           </a:xfrm>
           <a:prstGeom prst="rect">
             <a:avLst/>
@@ -6699,7 +7261,7 @@
             <a:r>
               <a:rPr sz="1400" b="0" i="0">
                 <a:solidFill>
-                  <a:srgbClr val="666666"/>
+                  <a:srgbClr val="26231F"/>
                 </a:solidFill>
               </a:rPr>
               <a:t>아기 이름 · 부모 이름</a:t>
@@ -6726,34 +7288,34 @@
         <a:sysClr val="window" lastClr="FFFFFF"/>
       </a:lt1>
       <a:dk2>
-        <a:srgbClr val="253A41"/>
+        <a:srgbClr val="274149"/>
       </a:dk2>
       <a:lt2>
-        <a:srgbClr val="F2F6F8"/>
+        <a:srgbClr val="ECF7FB"/>
       </a:lt2>
       <a:accent1>
-        <a:srgbClr val="497483"/>
+        <a:srgbClr val="98CFE1"/>
       </a:accent1>
       <a:accent2>
-        <a:srgbClr val="834958"/>
+        <a:srgbClr val="B8C6EA"/>
       </a:accent2>
       <a:accent3>
-        <a:srgbClr val="253A41"/>
+        <a:srgbClr val="274149"/>
       </a:accent3>
       <a:accent4>
-        <a:srgbClr val="D6E5EA"/>
+        <a:srgbClr val="D5EEF6"/>
       </a:accent4>
       <a:accent5>
-        <a:srgbClr val="665E6E"/>
+        <a:srgbClr val="A8CAE6"/>
       </a:accent5>
       <a:accent6>
-        <a:srgbClr val="7C898D"/>
+        <a:srgbClr val="7D8D92"/>
       </a:accent6>
       <a:hlink>
-        <a:srgbClr val="497483"/>
+        <a:srgbClr val="98CFE1"/>
       </a:hlink>
       <a:folHlink>
-        <a:srgbClr val="253A41"/>
+        <a:srgbClr val="274149"/>
       </a:folHlink>
     </a:clrScheme>
     <a:fontScheme name="Office">
